--- a/outputs/4112-hodogaya-slides.pptx
+++ b/outputs/4112-hodogaya-slides.pptx
@@ -3193,14 +3193,14 @@
           <a:noFill/>
         </p:spPr>
         <p:txBody>
-          <a:bodyPr wrap="square" lIns="45720" rIns="45720" tIns="18288" bIns="18288">
-            <a:spAutoFit/>
+          <a:bodyPr wrap="square" anchor="t" lIns="0" rIns="0" tIns="0" bIns="0">
+            <a:noAutofit/>
           </a:bodyPr>
           <a:lstStyle/>
           <a:p>
             <a:pPr algn="ctr"/>
             <a:r>
-              <a:rPr sz="5400" b="1">
+              <a:rPr sz="5400" b="1" i="0">
                 <a:solidFill>
                   <a:srgbClr val="1F4E78"/>
                 </a:solidFill>
@@ -3227,14 +3227,14 @@
           <a:noFill/>
         </p:spPr>
         <p:txBody>
-          <a:bodyPr wrap="square" lIns="45720" rIns="45720" tIns="18288" bIns="18288">
-            <a:spAutoFit/>
+          <a:bodyPr wrap="square" anchor="t" lIns="0" rIns="0" tIns="0" bIns="0">
+            <a:noAutofit/>
           </a:bodyPr>
           <a:lstStyle/>
           <a:p>
             <a:pPr algn="ctr"/>
             <a:r>
-              <a:rPr sz="2600" b="0">
+              <a:rPr sz="2600" b="0" i="0">
                 <a:solidFill>
                   <a:srgbClr val="202020"/>
                 </a:solidFill>
@@ -3261,14 +3261,14 @@
           <a:noFill/>
         </p:spPr>
         <p:txBody>
-          <a:bodyPr wrap="square" lIns="45720" rIns="45720" tIns="18288" bIns="18288">
-            <a:spAutoFit/>
+          <a:bodyPr wrap="square" anchor="t" lIns="0" rIns="0" tIns="0" bIns="0">
+            <a:noAutofit/>
           </a:bodyPr>
           <a:lstStyle/>
           <a:p>
             <a:pPr algn="ctr"/>
             <a:r>
-              <a:rPr sz="2600" b="0">
+              <a:rPr sz="2600" b="0" i="0">
                 <a:solidFill>
                   <a:srgbClr val="202020"/>
                 </a:solidFill>
@@ -3295,14 +3295,14 @@
           <a:noFill/>
         </p:spPr>
         <p:txBody>
-          <a:bodyPr wrap="square" lIns="45720" rIns="45720" tIns="18288" bIns="18288">
-            <a:spAutoFit/>
+          <a:bodyPr wrap="square" anchor="t" lIns="0" rIns="0" tIns="0" bIns="0">
+            <a:noAutofit/>
           </a:bodyPr>
           <a:lstStyle/>
           <a:p>
             <a:pPr algn="ctr"/>
             <a:r>
-              <a:rPr sz="2600" b="0">
+              <a:rPr sz="2600" b="0" i="0">
                 <a:solidFill>
                   <a:srgbClr val="202020"/>
                 </a:solidFill>
@@ -3329,14 +3329,14 @@
           <a:noFill/>
         </p:spPr>
         <p:txBody>
-          <a:bodyPr wrap="square" lIns="45720" rIns="45720" tIns="18288" bIns="18288">
-            <a:spAutoFit/>
+          <a:bodyPr wrap="square" anchor="t" lIns="0" rIns="0" tIns="0" bIns="0">
+            <a:noAutofit/>
           </a:bodyPr>
           <a:lstStyle/>
           <a:p>
             <a:pPr algn="ctr"/>
             <a:r>
-              <a:rPr sz="1800" b="0">
+              <a:rPr sz="1800" b="0" i="0">
                 <a:solidFill>
                   <a:srgbClr val="808080"/>
                 </a:solidFill>
@@ -3415,8 +3415,8 @@
         </p:nvSpPr>
         <p:spPr>
           <a:xfrm>
-            <a:off x="457200" y="457200"/>
-            <a:ext cx="11277295" cy="822960"/>
+            <a:off x="457200" y="365760"/>
+            <a:ext cx="11277295" cy="914400"/>
           </a:xfrm>
           <a:prstGeom prst="rect">
             <a:avLst/>
@@ -3424,14 +3424,14 @@
           <a:noFill/>
         </p:spPr>
         <p:txBody>
-          <a:bodyPr wrap="square" lIns="45720" rIns="45720" tIns="18288" bIns="18288">
-            <a:spAutoFit/>
+          <a:bodyPr wrap="square" anchor="ctr" lIns="0" rIns="0" tIns="0" bIns="0">
+            <a:noAutofit/>
           </a:bodyPr>
           <a:lstStyle/>
           <a:p>
             <a:pPr algn="l"/>
             <a:r>
-              <a:rPr sz="3000" b="1">
+              <a:rPr sz="2800" b="1" i="0">
                 <a:solidFill>
                   <a:srgbClr val="1F4E78"/>
                 </a:solidFill>
@@ -3449,8 +3449,8 @@
         </p:nvSpPr>
         <p:spPr>
           <a:xfrm>
-            <a:off x="457200" y="1234440"/>
-            <a:ext cx="1828800" cy="36576"/>
+            <a:off x="457200" y="1298448"/>
+            <a:ext cx="2194560" cy="36576"/>
           </a:xfrm>
           <a:prstGeom prst="rect">
             <a:avLst/>
@@ -3492,8 +3492,8 @@
         </p:nvSpPr>
         <p:spPr>
           <a:xfrm>
-            <a:off x="457200" y="1463040"/>
-            <a:ext cx="11277295" cy="640080"/>
+            <a:off x="457200" y="1508760"/>
+            <a:ext cx="11277295" cy="502920"/>
           </a:xfrm>
           <a:prstGeom prst="rect">
             <a:avLst/>
@@ -3501,14 +3501,14 @@
           <a:noFill/>
         </p:spPr>
         <p:txBody>
-          <a:bodyPr wrap="square" lIns="45720" rIns="45720" tIns="18288" bIns="18288">
-            <a:spAutoFit/>
+          <a:bodyPr wrap="square" anchor="ctr" lIns="0" rIns="0" tIns="0" bIns="0">
+            <a:noAutofit/>
           </a:bodyPr>
           <a:lstStyle/>
           <a:p>
             <a:pPr algn="l"/>
             <a:r>
-              <a:rPr sz="2200" b="1">
+              <a:rPr sz="2000" b="1" i="0">
                 <a:solidFill>
                   <a:srgbClr val="C0392B"/>
                 </a:solidFill>
@@ -3526,8 +3526,8 @@
         </p:nvSpPr>
         <p:spPr>
           <a:xfrm>
-            <a:off x="640080" y="2286000"/>
-            <a:ext cx="10911535" cy="4069080"/>
+            <a:off x="640080" y="2148840"/>
+            <a:ext cx="10911535" cy="4114800"/>
           </a:xfrm>
           <a:prstGeom prst="rect">
             <a:avLst/>
@@ -3535,15 +3535,18 @@
           <a:noFill/>
         </p:spPr>
         <p:txBody>
-          <a:bodyPr wrap="square" lIns="45720" rIns="45720">
-            <a:spAutoFit/>
+          <a:bodyPr wrap="square" anchor="t" lIns="0" rIns="0" tIns="0" bIns="0">
+            <a:noAutofit/>
           </a:bodyPr>
           <a:lstStyle/>
           <a:p>
             <a:pPr algn="l">
               <a:lnSpc>
-                <a:spcPct val="130000"/>
+                <a:spcPct val="135000"/>
               </a:lnSpc>
+              <a:spcAft>
+                <a:spcPts val="600"/>
+              </a:spcAft>
             </a:pPr>
             <a:r>
               <a:rPr sz="1800">
@@ -3557,8 +3560,11 @@
           <a:p>
             <a:pPr algn="l">
               <a:lnSpc>
-                <a:spcPct val="130000"/>
+                <a:spcPct val="135000"/>
               </a:lnSpc>
+              <a:spcAft>
+                <a:spcPts val="600"/>
+              </a:spcAft>
             </a:pPr>
             <a:r>
               <a:rPr sz="1800">
@@ -3572,8 +3578,11 @@
           <a:p>
             <a:pPr algn="l">
               <a:lnSpc>
-                <a:spcPct val="130000"/>
+                <a:spcPct val="135000"/>
               </a:lnSpc>
+              <a:spcAft>
+                <a:spcPts val="600"/>
+              </a:spcAft>
             </a:pPr>
             <a:r>
               <a:rPr sz="1800">
@@ -3612,8 +3621,8 @@
         </p:nvSpPr>
         <p:spPr>
           <a:xfrm>
-            <a:off x="457200" y="457200"/>
-            <a:ext cx="11277295" cy="822960"/>
+            <a:off x="457200" y="365760"/>
+            <a:ext cx="11277295" cy="914400"/>
           </a:xfrm>
           <a:prstGeom prst="rect">
             <a:avLst/>
@@ -3621,14 +3630,14 @@
           <a:noFill/>
         </p:spPr>
         <p:txBody>
-          <a:bodyPr wrap="square" lIns="45720" rIns="45720" tIns="18288" bIns="18288">
-            <a:spAutoFit/>
+          <a:bodyPr wrap="square" anchor="ctr" lIns="0" rIns="0" tIns="0" bIns="0">
+            <a:noAutofit/>
           </a:bodyPr>
           <a:lstStyle/>
           <a:p>
             <a:pPr algn="l"/>
             <a:r>
-              <a:rPr sz="3000" b="1">
+              <a:rPr sz="2800" b="1" i="0">
                 <a:solidFill>
                   <a:srgbClr val="1F4E78"/>
                 </a:solidFill>
@@ -3646,8 +3655,8 @@
         </p:nvSpPr>
         <p:spPr>
           <a:xfrm>
-            <a:off x="457200" y="1234440"/>
-            <a:ext cx="1828800" cy="36576"/>
+            <a:off x="457200" y="1298448"/>
+            <a:ext cx="2194560" cy="36576"/>
           </a:xfrm>
           <a:prstGeom prst="rect">
             <a:avLst/>
@@ -3689,8 +3698,8 @@
         </p:nvSpPr>
         <p:spPr>
           <a:xfrm>
-            <a:off x="457200" y="1463040"/>
-            <a:ext cx="11277295" cy="640080"/>
+            <a:off x="457200" y="1508760"/>
+            <a:ext cx="11277295" cy="502920"/>
           </a:xfrm>
           <a:prstGeom prst="rect">
             <a:avLst/>
@@ -3698,14 +3707,14 @@
           <a:noFill/>
         </p:spPr>
         <p:txBody>
-          <a:bodyPr wrap="square" lIns="45720" rIns="45720" tIns="18288" bIns="18288">
-            <a:spAutoFit/>
+          <a:bodyPr wrap="square" anchor="ctr" lIns="0" rIns="0" tIns="0" bIns="0">
+            <a:noAutofit/>
           </a:bodyPr>
           <a:lstStyle/>
           <a:p>
             <a:pPr algn="l"/>
             <a:r>
-              <a:rPr sz="2200" b="1">
+              <a:rPr sz="2000" b="1" i="0">
                 <a:solidFill>
                   <a:srgbClr val="C0392B"/>
                 </a:solidFill>
@@ -3723,8 +3732,8 @@
         </p:nvSpPr>
         <p:spPr>
           <a:xfrm>
-            <a:off x="731520" y="2286000"/>
-            <a:ext cx="10728655" cy="3977640"/>
+            <a:off x="731520" y="2148840"/>
+            <a:ext cx="10728655" cy="4114800"/>
           </a:xfrm>
           <a:prstGeom prst="rect">
             <a:avLst/>
@@ -3732,8 +3741,8 @@
           <a:noFill/>
         </p:spPr>
         <p:txBody>
-          <a:bodyPr wrap="none" tIns="91440">
-            <a:spAutoFit/>
+          <a:bodyPr wrap="none" anchor="t" tIns="91440">
+            <a:noAutofit/>
           </a:bodyPr>
           <a:lstStyle/>
           <a:p>
@@ -3790,8 +3799,8 @@
         </p:nvSpPr>
         <p:spPr>
           <a:xfrm>
-            <a:off x="457200" y="457200"/>
-            <a:ext cx="11277295" cy="822960"/>
+            <a:off x="457200" y="365760"/>
+            <a:ext cx="11277295" cy="914400"/>
           </a:xfrm>
           <a:prstGeom prst="rect">
             <a:avLst/>
@@ -3799,14 +3808,14 @@
           <a:noFill/>
         </p:spPr>
         <p:txBody>
-          <a:bodyPr wrap="square" lIns="45720" rIns="45720" tIns="18288" bIns="18288">
-            <a:spAutoFit/>
+          <a:bodyPr wrap="square" anchor="ctr" lIns="0" rIns="0" tIns="0" bIns="0">
+            <a:noAutofit/>
           </a:bodyPr>
           <a:lstStyle/>
           <a:p>
             <a:pPr algn="l"/>
             <a:r>
-              <a:rPr sz="3000" b="1">
+              <a:rPr sz="2800" b="1" i="0">
                 <a:solidFill>
                   <a:srgbClr val="1F4E78"/>
                 </a:solidFill>
@@ -3824,8 +3833,8 @@
         </p:nvSpPr>
         <p:spPr>
           <a:xfrm>
-            <a:off x="457200" y="1234440"/>
-            <a:ext cx="1828800" cy="36576"/>
+            <a:off x="457200" y="1298448"/>
+            <a:ext cx="2194560" cy="36576"/>
           </a:xfrm>
           <a:prstGeom prst="rect">
             <a:avLst/>
@@ -3867,8 +3876,8 @@
         </p:nvSpPr>
         <p:spPr>
           <a:xfrm>
-            <a:off x="457200" y="1463040"/>
-            <a:ext cx="11277295" cy="640080"/>
+            <a:off x="457200" y="1508760"/>
+            <a:ext cx="11277295" cy="502920"/>
           </a:xfrm>
           <a:prstGeom prst="rect">
             <a:avLst/>
@@ -3876,14 +3885,14 @@
           <a:noFill/>
         </p:spPr>
         <p:txBody>
-          <a:bodyPr wrap="square" lIns="45720" rIns="45720" tIns="18288" bIns="18288">
-            <a:spAutoFit/>
+          <a:bodyPr wrap="square" anchor="ctr" lIns="0" rIns="0" tIns="0" bIns="0">
+            <a:noAutofit/>
           </a:bodyPr>
           <a:lstStyle/>
           <a:p>
             <a:pPr algn="l"/>
             <a:r>
-              <a:rPr sz="2200" b="1">
+              <a:rPr sz="2000" b="1" i="0">
                 <a:solidFill>
                   <a:srgbClr val="C0392B"/>
                 </a:solidFill>
@@ -3901,8 +3910,8 @@
         </p:nvSpPr>
         <p:spPr>
           <a:xfrm>
-            <a:off x="640080" y="2286000"/>
-            <a:ext cx="10911535" cy="4069080"/>
+            <a:off x="640080" y="2148840"/>
+            <a:ext cx="10911535" cy="4114800"/>
           </a:xfrm>
           <a:prstGeom prst="rect">
             <a:avLst/>
@@ -3910,15 +3919,18 @@
           <a:noFill/>
         </p:spPr>
         <p:txBody>
-          <a:bodyPr wrap="square" lIns="45720" rIns="45720">
-            <a:spAutoFit/>
+          <a:bodyPr wrap="square" anchor="t" lIns="0" rIns="0" tIns="0" bIns="0">
+            <a:noAutofit/>
           </a:bodyPr>
           <a:lstStyle/>
           <a:p>
             <a:pPr algn="l">
               <a:lnSpc>
-                <a:spcPct val="130000"/>
+                <a:spcPct val="135000"/>
               </a:lnSpc>
+              <a:spcAft>
+                <a:spcPts val="600"/>
+              </a:spcAft>
             </a:pPr>
             <a:r>
               <a:rPr sz="1800">
@@ -3932,8 +3944,11 @@
           <a:p>
             <a:pPr algn="l">
               <a:lnSpc>
-                <a:spcPct val="130000"/>
+                <a:spcPct val="135000"/>
               </a:lnSpc>
+              <a:spcAft>
+                <a:spcPts val="600"/>
+              </a:spcAft>
             </a:pPr>
             <a:r>
               <a:rPr sz="1800">
@@ -3947,8 +3962,11 @@
           <a:p>
             <a:pPr algn="l">
               <a:lnSpc>
-                <a:spcPct val="130000"/>
+                <a:spcPct val="135000"/>
               </a:lnSpc>
+              <a:spcAft>
+                <a:spcPts val="600"/>
+              </a:spcAft>
             </a:pPr>
             <a:r>
               <a:rPr sz="1800">
@@ -3987,8 +4005,8 @@
         </p:nvSpPr>
         <p:spPr>
           <a:xfrm>
-            <a:off x="457200" y="457200"/>
-            <a:ext cx="11277295" cy="822960"/>
+            <a:off x="457200" y="365760"/>
+            <a:ext cx="11277295" cy="914400"/>
           </a:xfrm>
           <a:prstGeom prst="rect">
             <a:avLst/>
@@ -3996,14 +4014,14 @@
           <a:noFill/>
         </p:spPr>
         <p:txBody>
-          <a:bodyPr wrap="square" lIns="45720" rIns="45720" tIns="18288" bIns="18288">
-            <a:spAutoFit/>
+          <a:bodyPr wrap="square" anchor="ctr" lIns="0" rIns="0" tIns="0" bIns="0">
+            <a:noAutofit/>
           </a:bodyPr>
           <a:lstStyle/>
           <a:p>
             <a:pPr algn="l"/>
             <a:r>
-              <a:rPr sz="3000" b="1">
+              <a:rPr sz="2800" b="1" i="0">
                 <a:solidFill>
                   <a:srgbClr val="1F4E78"/>
                 </a:solidFill>
@@ -4021,8 +4039,8 @@
         </p:nvSpPr>
         <p:spPr>
           <a:xfrm>
-            <a:off x="457200" y="1234440"/>
-            <a:ext cx="1828800" cy="36576"/>
+            <a:off x="457200" y="1298448"/>
+            <a:ext cx="2194560" cy="36576"/>
           </a:xfrm>
           <a:prstGeom prst="rect">
             <a:avLst/>
@@ -4064,8 +4082,8 @@
         </p:nvSpPr>
         <p:spPr>
           <a:xfrm>
-            <a:off x="457200" y="1463040"/>
-            <a:ext cx="11277295" cy="640080"/>
+            <a:off x="457200" y="1508760"/>
+            <a:ext cx="11277295" cy="502920"/>
           </a:xfrm>
           <a:prstGeom prst="rect">
             <a:avLst/>
@@ -4073,14 +4091,14 @@
           <a:noFill/>
         </p:spPr>
         <p:txBody>
-          <a:bodyPr wrap="square" lIns="45720" rIns="45720" tIns="18288" bIns="18288">
-            <a:spAutoFit/>
+          <a:bodyPr wrap="square" anchor="ctr" lIns="0" rIns="0" tIns="0" bIns="0">
+            <a:noAutofit/>
           </a:bodyPr>
           <a:lstStyle/>
           <a:p>
             <a:pPr algn="l"/>
             <a:r>
-              <a:rPr sz="2200" b="1">
+              <a:rPr sz="2000" b="1" i="0">
                 <a:solidFill>
                   <a:srgbClr val="C0392B"/>
                 </a:solidFill>
@@ -4098,8 +4116,8 @@
         </p:nvSpPr>
         <p:spPr>
           <a:xfrm>
-            <a:off x="731520" y="2286000"/>
-            <a:ext cx="10728655" cy="3977640"/>
+            <a:off x="731520" y="2148840"/>
+            <a:ext cx="10728655" cy="4114800"/>
           </a:xfrm>
           <a:prstGeom prst="rect">
             <a:avLst/>
@@ -4107,8 +4125,8 @@
           <a:noFill/>
         </p:spPr>
         <p:txBody>
-          <a:bodyPr wrap="none" tIns="91440">
-            <a:spAutoFit/>
+          <a:bodyPr wrap="none" anchor="t" tIns="91440">
+            <a:noAutofit/>
           </a:bodyPr>
           <a:lstStyle/>
           <a:p>
@@ -4166,8 +4184,8 @@
         </p:nvSpPr>
         <p:spPr>
           <a:xfrm>
-            <a:off x="457200" y="457200"/>
-            <a:ext cx="11277295" cy="822960"/>
+            <a:off x="457200" y="365760"/>
+            <a:ext cx="11277295" cy="914400"/>
           </a:xfrm>
           <a:prstGeom prst="rect">
             <a:avLst/>
@@ -4175,14 +4193,14 @@
           <a:noFill/>
         </p:spPr>
         <p:txBody>
-          <a:bodyPr wrap="square" lIns="45720" rIns="45720" tIns="18288" bIns="18288">
-            <a:spAutoFit/>
+          <a:bodyPr wrap="square" anchor="ctr" lIns="0" rIns="0" tIns="0" bIns="0">
+            <a:noAutofit/>
           </a:bodyPr>
           <a:lstStyle/>
           <a:p>
             <a:pPr algn="l"/>
             <a:r>
-              <a:rPr sz="3000" b="1">
+              <a:rPr sz="2800" b="1" i="0">
                 <a:solidFill>
                   <a:srgbClr val="1F4E78"/>
                 </a:solidFill>
@@ -4200,8 +4218,8 @@
         </p:nvSpPr>
         <p:spPr>
           <a:xfrm>
-            <a:off x="457200" y="1234440"/>
-            <a:ext cx="1828800" cy="36576"/>
+            <a:off x="457200" y="1298448"/>
+            <a:ext cx="2194560" cy="36576"/>
           </a:xfrm>
           <a:prstGeom prst="rect">
             <a:avLst/>
@@ -4243,8 +4261,8 @@
         </p:nvSpPr>
         <p:spPr>
           <a:xfrm>
-            <a:off x="457200" y="1463040"/>
-            <a:ext cx="11277295" cy="640080"/>
+            <a:off x="457200" y="1508760"/>
+            <a:ext cx="11277295" cy="502920"/>
           </a:xfrm>
           <a:prstGeom prst="rect">
             <a:avLst/>
@@ -4252,14 +4270,14 @@
           <a:noFill/>
         </p:spPr>
         <p:txBody>
-          <a:bodyPr wrap="square" lIns="45720" rIns="45720" tIns="18288" bIns="18288">
-            <a:spAutoFit/>
+          <a:bodyPr wrap="square" anchor="ctr" lIns="0" rIns="0" tIns="0" bIns="0">
+            <a:noAutofit/>
           </a:bodyPr>
           <a:lstStyle/>
           <a:p>
             <a:pPr algn="l"/>
             <a:r>
-              <a:rPr sz="2200" b="1">
+              <a:rPr sz="2000" b="1" i="0">
                 <a:solidFill>
                   <a:srgbClr val="C0392B"/>
                 </a:solidFill>
@@ -4277,8 +4295,8 @@
         </p:nvSpPr>
         <p:spPr>
           <a:xfrm>
-            <a:off x="640080" y="2286000"/>
-            <a:ext cx="10911535" cy="4069080"/>
+            <a:off x="640080" y="2148840"/>
+            <a:ext cx="10911535" cy="4114800"/>
           </a:xfrm>
           <a:prstGeom prst="rect">
             <a:avLst/>
@@ -4286,15 +4304,18 @@
           <a:noFill/>
         </p:spPr>
         <p:txBody>
-          <a:bodyPr wrap="square" lIns="45720" rIns="45720">
-            <a:spAutoFit/>
+          <a:bodyPr wrap="square" anchor="t" lIns="0" rIns="0" tIns="0" bIns="0">
+            <a:noAutofit/>
           </a:bodyPr>
           <a:lstStyle/>
           <a:p>
             <a:pPr algn="l">
               <a:lnSpc>
-                <a:spcPct val="130000"/>
+                <a:spcPct val="135000"/>
               </a:lnSpc>
+              <a:spcAft>
+                <a:spcPts val="600"/>
+              </a:spcAft>
             </a:pPr>
             <a:r>
               <a:rPr sz="1800">
@@ -4308,8 +4329,11 @@
           <a:p>
             <a:pPr algn="l">
               <a:lnSpc>
-                <a:spcPct val="130000"/>
+                <a:spcPct val="135000"/>
               </a:lnSpc>
+              <a:spcAft>
+                <a:spcPts val="600"/>
+              </a:spcAft>
             </a:pPr>
             <a:r>
               <a:rPr sz="1800">
@@ -4323,8 +4347,11 @@
           <a:p>
             <a:pPr algn="l">
               <a:lnSpc>
-                <a:spcPct val="130000"/>
+                <a:spcPct val="135000"/>
               </a:lnSpc>
+              <a:spcAft>
+                <a:spcPts val="600"/>
+              </a:spcAft>
             </a:pPr>
             <a:r>
               <a:rPr sz="1800">
@@ -4338,8 +4365,11 @@
           <a:p>
             <a:pPr algn="l">
               <a:lnSpc>
-                <a:spcPct val="130000"/>
+                <a:spcPct val="135000"/>
               </a:lnSpc>
+              <a:spcAft>
+                <a:spcPts val="600"/>
+              </a:spcAft>
             </a:pPr>
             <a:r>
               <a:rPr sz="1800">
@@ -4378,8 +4408,8 @@
         </p:nvSpPr>
         <p:spPr>
           <a:xfrm>
-            <a:off x="457200" y="457200"/>
-            <a:ext cx="11277295" cy="822960"/>
+            <a:off x="457200" y="365760"/>
+            <a:ext cx="11277295" cy="914400"/>
           </a:xfrm>
           <a:prstGeom prst="rect">
             <a:avLst/>
@@ -4387,14 +4417,14 @@
           <a:noFill/>
         </p:spPr>
         <p:txBody>
-          <a:bodyPr wrap="square" lIns="45720" rIns="45720" tIns="18288" bIns="18288">
-            <a:spAutoFit/>
+          <a:bodyPr wrap="square" anchor="ctr" lIns="0" rIns="0" tIns="0" bIns="0">
+            <a:noAutofit/>
           </a:bodyPr>
           <a:lstStyle/>
           <a:p>
             <a:pPr algn="l"/>
             <a:r>
-              <a:rPr sz="3000" b="1">
+              <a:rPr sz="2800" b="1" i="0">
                 <a:solidFill>
                   <a:srgbClr val="1F4E78"/>
                 </a:solidFill>
@@ -4412,8 +4442,8 @@
         </p:nvSpPr>
         <p:spPr>
           <a:xfrm>
-            <a:off x="457200" y="1234440"/>
-            <a:ext cx="1828800" cy="36576"/>
+            <a:off x="457200" y="1298448"/>
+            <a:ext cx="2194560" cy="36576"/>
           </a:xfrm>
           <a:prstGeom prst="rect">
             <a:avLst/>
@@ -4455,8 +4485,8 @@
         </p:nvSpPr>
         <p:spPr>
           <a:xfrm>
-            <a:off x="457200" y="1463040"/>
-            <a:ext cx="11277295" cy="640080"/>
+            <a:off x="457200" y="1508760"/>
+            <a:ext cx="11277295" cy="502920"/>
           </a:xfrm>
           <a:prstGeom prst="rect">
             <a:avLst/>
@@ -4464,14 +4494,14 @@
           <a:noFill/>
         </p:spPr>
         <p:txBody>
-          <a:bodyPr wrap="square" lIns="45720" rIns="45720" tIns="18288" bIns="18288">
-            <a:spAutoFit/>
+          <a:bodyPr wrap="square" anchor="ctr" lIns="0" rIns="0" tIns="0" bIns="0">
+            <a:noAutofit/>
           </a:bodyPr>
           <a:lstStyle/>
           <a:p>
             <a:pPr algn="l"/>
             <a:r>
-              <a:rPr sz="2200" b="1">
+              <a:rPr sz="2000" b="1" i="0">
                 <a:solidFill>
                   <a:srgbClr val="C0392B"/>
                 </a:solidFill>
@@ -4489,8 +4519,8 @@
         </p:nvSpPr>
         <p:spPr>
           <a:xfrm>
-            <a:off x="640080" y="2286000"/>
-            <a:ext cx="10911535" cy="4069080"/>
+            <a:off x="640080" y="2148840"/>
+            <a:ext cx="10911535" cy="4114800"/>
           </a:xfrm>
           <a:prstGeom prst="rect">
             <a:avLst/>
@@ -4498,15 +4528,18 @@
           <a:noFill/>
         </p:spPr>
         <p:txBody>
-          <a:bodyPr wrap="square" lIns="45720" rIns="45720">
-            <a:spAutoFit/>
+          <a:bodyPr wrap="square" anchor="t" lIns="0" rIns="0" tIns="0" bIns="0">
+            <a:noAutofit/>
           </a:bodyPr>
           <a:lstStyle/>
           <a:p>
             <a:pPr algn="l">
               <a:lnSpc>
-                <a:spcPct val="130000"/>
+                <a:spcPct val="135000"/>
               </a:lnSpc>
+              <a:spcAft>
+                <a:spcPts val="600"/>
+              </a:spcAft>
             </a:pPr>
             <a:r>
               <a:rPr sz="1800">
@@ -4520,8 +4553,11 @@
           <a:p>
             <a:pPr algn="l">
               <a:lnSpc>
-                <a:spcPct val="130000"/>
+                <a:spcPct val="135000"/>
               </a:lnSpc>
+              <a:spcAft>
+                <a:spcPts val="600"/>
+              </a:spcAft>
             </a:pPr>
             <a:r>
               <a:rPr sz="1800">
@@ -4535,8 +4571,11 @@
           <a:p>
             <a:pPr algn="l">
               <a:lnSpc>
-                <a:spcPct val="130000"/>
+                <a:spcPct val="135000"/>
               </a:lnSpc>
+              <a:spcAft>
+                <a:spcPts val="600"/>
+              </a:spcAft>
             </a:pPr>
             <a:r>
               <a:rPr sz="1800">
@@ -4575,8 +4614,8 @@
         </p:nvSpPr>
         <p:spPr>
           <a:xfrm>
-            <a:off x="457200" y="457200"/>
-            <a:ext cx="11277295" cy="822960"/>
+            <a:off x="457200" y="365760"/>
+            <a:ext cx="11277295" cy="914400"/>
           </a:xfrm>
           <a:prstGeom prst="rect">
             <a:avLst/>
@@ -4584,14 +4623,14 @@
           <a:noFill/>
         </p:spPr>
         <p:txBody>
-          <a:bodyPr wrap="square" lIns="45720" rIns="45720" tIns="18288" bIns="18288">
-            <a:spAutoFit/>
+          <a:bodyPr wrap="square" anchor="ctr" lIns="0" rIns="0" tIns="0" bIns="0">
+            <a:noAutofit/>
           </a:bodyPr>
           <a:lstStyle/>
           <a:p>
             <a:pPr algn="l"/>
             <a:r>
-              <a:rPr sz="3000" b="1">
+              <a:rPr sz="2800" b="1" i="0">
                 <a:solidFill>
                   <a:srgbClr val="1F4E78"/>
                 </a:solidFill>
@@ -4609,8 +4648,8 @@
         </p:nvSpPr>
         <p:spPr>
           <a:xfrm>
-            <a:off x="457200" y="1234440"/>
-            <a:ext cx="1828800" cy="36576"/>
+            <a:off x="457200" y="1298448"/>
+            <a:ext cx="2194560" cy="36576"/>
           </a:xfrm>
           <a:prstGeom prst="rect">
             <a:avLst/>
@@ -4652,8 +4691,8 @@
         </p:nvSpPr>
         <p:spPr>
           <a:xfrm>
-            <a:off x="822960" y="1463040"/>
-            <a:ext cx="10545775" cy="4892040"/>
+            <a:off x="822960" y="2148840"/>
+            <a:ext cx="10545775" cy="4114800"/>
           </a:xfrm>
           <a:prstGeom prst="rect">
             <a:avLst/>
@@ -4661,15 +4700,18 @@
           <a:noFill/>
         </p:spPr>
         <p:txBody>
-          <a:bodyPr wrap="square" lIns="45720" rIns="45720">
-            <a:spAutoFit/>
+          <a:bodyPr wrap="square" anchor="t" lIns="0" rIns="0" tIns="0" bIns="0">
+            <a:noAutofit/>
           </a:bodyPr>
           <a:lstStyle/>
           <a:p>
             <a:pPr algn="l">
               <a:lnSpc>
-                <a:spcPct val="130000"/>
+                <a:spcPct val="135000"/>
               </a:lnSpc>
+              <a:spcAft>
+                <a:spcPts val="600"/>
+              </a:spcAft>
             </a:pPr>
             <a:r>
               <a:rPr sz="2200">
@@ -4760,14 +4802,14 @@
           <a:noFill/>
         </p:spPr>
         <p:txBody>
-          <a:bodyPr wrap="square" lIns="45720" rIns="45720" tIns="18288" bIns="18288">
-            <a:spAutoFit/>
+          <a:bodyPr wrap="square" anchor="ctr" lIns="0" rIns="0" tIns="0" bIns="0">
+            <a:noAutofit/>
           </a:bodyPr>
           <a:lstStyle/>
           <a:p>
             <a:pPr algn="ctr"/>
             <a:r>
-              <a:rPr sz="5800" b="1">
+              <a:rPr sz="5800" b="1" i="0">
                 <a:solidFill>
                   <a:srgbClr val="FFFFFF"/>
                 </a:solidFill>
@@ -4803,8 +4845,8 @@
         </p:nvSpPr>
         <p:spPr>
           <a:xfrm>
-            <a:off x="457200" y="457200"/>
-            <a:ext cx="11277295" cy="822960"/>
+            <a:off x="457200" y="365760"/>
+            <a:ext cx="11277295" cy="914400"/>
           </a:xfrm>
           <a:prstGeom prst="rect">
             <a:avLst/>
@@ -4812,14 +4854,14 @@
           <a:noFill/>
         </p:spPr>
         <p:txBody>
-          <a:bodyPr wrap="square" lIns="45720" rIns="45720" tIns="18288" bIns="18288">
-            <a:spAutoFit/>
+          <a:bodyPr wrap="square" anchor="ctr" lIns="0" rIns="0" tIns="0" bIns="0">
+            <a:noAutofit/>
           </a:bodyPr>
           <a:lstStyle/>
           <a:p>
             <a:pPr algn="l"/>
             <a:r>
-              <a:rPr sz="3000" b="1">
+              <a:rPr sz="2800" b="1" i="0">
                 <a:solidFill>
                   <a:srgbClr val="1F4E78"/>
                 </a:solidFill>
@@ -4837,8 +4879,8 @@
         </p:nvSpPr>
         <p:spPr>
           <a:xfrm>
-            <a:off x="457200" y="1234440"/>
-            <a:ext cx="1828800" cy="36576"/>
+            <a:off x="457200" y="1298448"/>
+            <a:ext cx="2194560" cy="36576"/>
           </a:xfrm>
           <a:prstGeom prst="rect">
             <a:avLst/>
@@ -4880,8 +4922,8 @@
         </p:nvSpPr>
         <p:spPr>
           <a:xfrm>
-            <a:off x="457200" y="1463040"/>
-            <a:ext cx="11277295" cy="640080"/>
+            <a:off x="457200" y="1508760"/>
+            <a:ext cx="11277295" cy="502920"/>
           </a:xfrm>
           <a:prstGeom prst="rect">
             <a:avLst/>
@@ -4889,14 +4931,14 @@
           <a:noFill/>
         </p:spPr>
         <p:txBody>
-          <a:bodyPr wrap="square" lIns="45720" rIns="45720" tIns="18288" bIns="18288">
-            <a:spAutoFit/>
+          <a:bodyPr wrap="square" anchor="ctr" lIns="0" rIns="0" tIns="0" bIns="0">
+            <a:noAutofit/>
           </a:bodyPr>
           <a:lstStyle/>
           <a:p>
             <a:pPr algn="l"/>
             <a:r>
-              <a:rPr sz="2200" b="1">
+              <a:rPr sz="2000" b="1" i="0">
                 <a:solidFill>
                   <a:srgbClr val="C0392B"/>
                 </a:solidFill>
@@ -4914,8 +4956,8 @@
         </p:nvSpPr>
         <p:spPr>
           <a:xfrm>
-            <a:off x="731520" y="2286000"/>
-            <a:ext cx="10728655" cy="3977640"/>
+            <a:off x="731520" y="2148840"/>
+            <a:ext cx="10728655" cy="4114800"/>
           </a:xfrm>
           <a:prstGeom prst="rect">
             <a:avLst/>
@@ -4923,8 +4965,8 @@
           <a:noFill/>
         </p:spPr>
         <p:txBody>
-          <a:bodyPr wrap="none" tIns="91440">
-            <a:spAutoFit/>
+          <a:bodyPr wrap="none" anchor="t" tIns="91440">
+            <a:noAutofit/>
           </a:bodyPr>
           <a:lstStyle/>
           <a:p>
@@ -4977,8 +5019,8 @@
         </p:nvSpPr>
         <p:spPr>
           <a:xfrm>
-            <a:off x="457200" y="457200"/>
-            <a:ext cx="11277295" cy="822960"/>
+            <a:off x="457200" y="365760"/>
+            <a:ext cx="11277295" cy="914400"/>
           </a:xfrm>
           <a:prstGeom prst="rect">
             <a:avLst/>
@@ -4986,14 +5028,14 @@
           <a:noFill/>
         </p:spPr>
         <p:txBody>
-          <a:bodyPr wrap="square" lIns="45720" rIns="45720" tIns="18288" bIns="18288">
-            <a:spAutoFit/>
+          <a:bodyPr wrap="square" anchor="ctr" lIns="0" rIns="0" tIns="0" bIns="0">
+            <a:noAutofit/>
           </a:bodyPr>
           <a:lstStyle/>
           <a:p>
             <a:pPr algn="l"/>
             <a:r>
-              <a:rPr sz="3000" b="1">
+              <a:rPr sz="2800" b="1" i="0">
                 <a:solidFill>
                   <a:srgbClr val="1F4E78"/>
                 </a:solidFill>
@@ -5011,8 +5053,8 @@
         </p:nvSpPr>
         <p:spPr>
           <a:xfrm>
-            <a:off x="457200" y="1234440"/>
-            <a:ext cx="1828800" cy="36576"/>
+            <a:off x="457200" y="1298448"/>
+            <a:ext cx="2194560" cy="36576"/>
           </a:xfrm>
           <a:prstGeom prst="rect">
             <a:avLst/>
@@ -5054,8 +5096,8 @@
         </p:nvSpPr>
         <p:spPr>
           <a:xfrm>
-            <a:off x="457200" y="1463040"/>
-            <a:ext cx="11277295" cy="640080"/>
+            <a:off x="457200" y="1508760"/>
+            <a:ext cx="11277295" cy="502920"/>
           </a:xfrm>
           <a:prstGeom prst="rect">
             <a:avLst/>
@@ -5063,14 +5105,14 @@
           <a:noFill/>
         </p:spPr>
         <p:txBody>
-          <a:bodyPr wrap="square" lIns="45720" rIns="45720" tIns="18288" bIns="18288">
-            <a:spAutoFit/>
+          <a:bodyPr wrap="square" anchor="ctr" lIns="0" rIns="0" tIns="0" bIns="0">
+            <a:noAutofit/>
           </a:bodyPr>
           <a:lstStyle/>
           <a:p>
             <a:pPr algn="l"/>
             <a:r>
-              <a:rPr sz="2200" b="1">
+              <a:rPr sz="2000" b="1" i="0">
                 <a:solidFill>
                   <a:srgbClr val="C0392B"/>
                 </a:solidFill>
@@ -5089,7 +5131,7 @@
           <p:nvPr/>
         </p:nvGraphicFramePr>
         <p:xfrm>
-          <a:off x="457200" y="2286000"/>
+          <a:off x="457200" y="2148840"/>
           <a:ext cx="11277295" cy="2286000"/>
         </p:xfrm>
         <a:graphic>
@@ -5464,14 +5506,14 @@
           <a:noFill/>
         </p:spPr>
         <p:txBody>
-          <a:bodyPr wrap="square" lIns="45720" rIns="45720" tIns="18288" bIns="18288">
-            <a:spAutoFit/>
+          <a:bodyPr wrap="square" anchor="ctr" lIns="0" rIns="0" tIns="0" bIns="0">
+            <a:noAutofit/>
           </a:bodyPr>
           <a:lstStyle/>
           <a:p>
             <a:pPr algn="l"/>
             <a:r>
-              <a:rPr sz="1100" b="0">
+              <a:rPr sz="1100" b="0" i="1">
                 <a:solidFill>
                   <a:srgbClr val="808080"/>
                 </a:solidFill>
@@ -5507,8 +5549,8 @@
         </p:nvSpPr>
         <p:spPr>
           <a:xfrm>
-            <a:off x="457200" y="457200"/>
-            <a:ext cx="11277295" cy="822960"/>
+            <a:off x="457200" y="365760"/>
+            <a:ext cx="11277295" cy="914400"/>
           </a:xfrm>
           <a:prstGeom prst="rect">
             <a:avLst/>
@@ -5516,14 +5558,14 @@
           <a:noFill/>
         </p:spPr>
         <p:txBody>
-          <a:bodyPr wrap="square" lIns="45720" rIns="45720" tIns="18288" bIns="18288">
-            <a:spAutoFit/>
+          <a:bodyPr wrap="square" anchor="ctr" lIns="0" rIns="0" tIns="0" bIns="0">
+            <a:noAutofit/>
           </a:bodyPr>
           <a:lstStyle/>
           <a:p>
             <a:pPr algn="l"/>
             <a:r>
-              <a:rPr sz="3000" b="1">
+              <a:rPr sz="2800" b="1" i="0">
                 <a:solidFill>
                   <a:srgbClr val="1F4E78"/>
                 </a:solidFill>
@@ -5541,8 +5583,8 @@
         </p:nvSpPr>
         <p:spPr>
           <a:xfrm>
-            <a:off x="457200" y="1234440"/>
-            <a:ext cx="1828800" cy="36576"/>
+            <a:off x="457200" y="1298448"/>
+            <a:ext cx="2194560" cy="36576"/>
           </a:xfrm>
           <a:prstGeom prst="rect">
             <a:avLst/>
@@ -5584,8 +5626,8 @@
         </p:nvSpPr>
         <p:spPr>
           <a:xfrm>
-            <a:off x="457200" y="1463040"/>
-            <a:ext cx="11277295" cy="640080"/>
+            <a:off x="457200" y="1508760"/>
+            <a:ext cx="11277295" cy="502920"/>
           </a:xfrm>
           <a:prstGeom prst="rect">
             <a:avLst/>
@@ -5593,14 +5635,14 @@
           <a:noFill/>
         </p:spPr>
         <p:txBody>
-          <a:bodyPr wrap="square" lIns="45720" rIns="45720" tIns="18288" bIns="18288">
-            <a:spAutoFit/>
+          <a:bodyPr wrap="square" anchor="ctr" lIns="0" rIns="0" tIns="0" bIns="0">
+            <a:noAutofit/>
           </a:bodyPr>
           <a:lstStyle/>
           <a:p>
             <a:pPr algn="l"/>
             <a:r>
-              <a:rPr sz="2200" b="1">
+              <a:rPr sz="2000" b="1" i="0">
                 <a:solidFill>
                   <a:srgbClr val="C0392B"/>
                 </a:solidFill>
@@ -5618,8 +5660,8 @@
         </p:nvSpPr>
         <p:spPr>
           <a:xfrm>
-            <a:off x="640080" y="2286000"/>
-            <a:ext cx="10911535" cy="4069080"/>
+            <a:off x="640080" y="2148840"/>
+            <a:ext cx="10911535" cy="4114800"/>
           </a:xfrm>
           <a:prstGeom prst="rect">
             <a:avLst/>
@@ -5627,15 +5669,18 @@
           <a:noFill/>
         </p:spPr>
         <p:txBody>
-          <a:bodyPr wrap="square" lIns="45720" rIns="45720">
-            <a:spAutoFit/>
+          <a:bodyPr wrap="square" anchor="t" lIns="0" rIns="0" tIns="0" bIns="0">
+            <a:noAutofit/>
           </a:bodyPr>
           <a:lstStyle/>
           <a:p>
             <a:pPr algn="l">
               <a:lnSpc>
-                <a:spcPct val="130000"/>
+                <a:spcPct val="135000"/>
               </a:lnSpc>
+              <a:spcAft>
+                <a:spcPts val="600"/>
+              </a:spcAft>
             </a:pPr>
             <a:r>
               <a:rPr sz="1800">
@@ -5649,8 +5694,11 @@
           <a:p>
             <a:pPr algn="l">
               <a:lnSpc>
-                <a:spcPct val="130000"/>
+                <a:spcPct val="135000"/>
               </a:lnSpc>
+              <a:spcAft>
+                <a:spcPts val="600"/>
+              </a:spcAft>
             </a:pPr>
             <a:r>
               <a:rPr sz="1800">
@@ -5664,8 +5712,11 @@
           <a:p>
             <a:pPr algn="l">
               <a:lnSpc>
-                <a:spcPct val="130000"/>
+                <a:spcPct val="135000"/>
               </a:lnSpc>
+              <a:spcAft>
+                <a:spcPts val="600"/>
+              </a:spcAft>
             </a:pPr>
             <a:r>
               <a:rPr sz="1800">
@@ -5679,8 +5730,11 @@
           <a:p>
             <a:pPr algn="l">
               <a:lnSpc>
-                <a:spcPct val="130000"/>
+                <a:spcPct val="135000"/>
               </a:lnSpc>
+              <a:spcAft>
+                <a:spcPts val="600"/>
+              </a:spcAft>
             </a:pPr>
             <a:r>
               <a:rPr sz="1800">
@@ -5694,8 +5748,11 @@
           <a:p>
             <a:pPr algn="l">
               <a:lnSpc>
-                <a:spcPct val="130000"/>
+                <a:spcPct val="135000"/>
               </a:lnSpc>
+              <a:spcAft>
+                <a:spcPts val="600"/>
+              </a:spcAft>
             </a:pPr>
             <a:r>
               <a:rPr sz="1800">
@@ -5725,14 +5782,14 @@
           <a:noFill/>
         </p:spPr>
         <p:txBody>
-          <a:bodyPr wrap="square" lIns="45720" rIns="45720" tIns="18288" bIns="18288">
-            <a:spAutoFit/>
+          <a:bodyPr wrap="square" anchor="ctr" lIns="0" rIns="0" tIns="0" bIns="0">
+            <a:noAutofit/>
           </a:bodyPr>
           <a:lstStyle/>
           <a:p>
             <a:pPr algn="l"/>
             <a:r>
-              <a:rPr sz="1100" b="0">
+              <a:rPr sz="1100" b="0" i="1">
                 <a:solidFill>
                   <a:srgbClr val="808080"/>
                 </a:solidFill>
@@ -5768,8 +5825,8 @@
         </p:nvSpPr>
         <p:spPr>
           <a:xfrm>
-            <a:off x="457200" y="457200"/>
-            <a:ext cx="11277295" cy="822960"/>
+            <a:off x="457200" y="365760"/>
+            <a:ext cx="11277295" cy="914400"/>
           </a:xfrm>
           <a:prstGeom prst="rect">
             <a:avLst/>
@@ -5777,14 +5834,14 @@
           <a:noFill/>
         </p:spPr>
         <p:txBody>
-          <a:bodyPr wrap="square" lIns="45720" rIns="45720" tIns="18288" bIns="18288">
-            <a:spAutoFit/>
+          <a:bodyPr wrap="square" anchor="ctr" lIns="0" rIns="0" tIns="0" bIns="0">
+            <a:noAutofit/>
           </a:bodyPr>
           <a:lstStyle/>
           <a:p>
             <a:pPr algn="l"/>
             <a:r>
-              <a:rPr sz="3000" b="1">
+              <a:rPr sz="2800" b="1" i="0">
                 <a:solidFill>
                   <a:srgbClr val="1F4E78"/>
                 </a:solidFill>
@@ -5802,8 +5859,8 @@
         </p:nvSpPr>
         <p:spPr>
           <a:xfrm>
-            <a:off x="457200" y="1234440"/>
-            <a:ext cx="1828800" cy="36576"/>
+            <a:off x="457200" y="1298448"/>
+            <a:ext cx="2194560" cy="36576"/>
           </a:xfrm>
           <a:prstGeom prst="rect">
             <a:avLst/>
@@ -5845,8 +5902,8 @@
         </p:nvSpPr>
         <p:spPr>
           <a:xfrm>
-            <a:off x="457200" y="1463040"/>
-            <a:ext cx="11277295" cy="640080"/>
+            <a:off x="457200" y="1508760"/>
+            <a:ext cx="11277295" cy="502920"/>
           </a:xfrm>
           <a:prstGeom prst="rect">
             <a:avLst/>
@@ -5854,14 +5911,14 @@
           <a:noFill/>
         </p:spPr>
         <p:txBody>
-          <a:bodyPr wrap="square" lIns="45720" rIns="45720" tIns="18288" bIns="18288">
-            <a:spAutoFit/>
+          <a:bodyPr wrap="square" anchor="ctr" lIns="0" rIns="0" tIns="0" bIns="0">
+            <a:noAutofit/>
           </a:bodyPr>
           <a:lstStyle/>
           <a:p>
             <a:pPr algn="l"/>
             <a:r>
-              <a:rPr sz="2200" b="1">
+              <a:rPr sz="2000" b="1" i="0">
                 <a:solidFill>
                   <a:srgbClr val="C0392B"/>
                 </a:solidFill>
@@ -5880,7 +5937,7 @@
           <p:nvPr/>
         </p:nvGraphicFramePr>
         <p:xfrm>
-          <a:off x="457200" y="2286000"/>
+          <a:off x="457200" y="2148840"/>
           <a:ext cx="11277295" cy="3200400"/>
         </p:xfrm>
         <a:graphic>
@@ -6236,14 +6293,14 @@
           <a:noFill/>
         </p:spPr>
         <p:txBody>
-          <a:bodyPr wrap="square" lIns="45720" rIns="45720" tIns="18288" bIns="18288">
-            <a:spAutoFit/>
+          <a:bodyPr wrap="square" anchor="ctr" lIns="0" rIns="0" tIns="0" bIns="0">
+            <a:noAutofit/>
           </a:bodyPr>
           <a:lstStyle/>
           <a:p>
             <a:pPr algn="l"/>
             <a:r>
-              <a:rPr sz="1100" b="0">
+              <a:rPr sz="1100" b="0" i="1">
                 <a:solidFill>
                   <a:srgbClr val="808080"/>
                 </a:solidFill>
@@ -6279,8 +6336,8 @@
         </p:nvSpPr>
         <p:spPr>
           <a:xfrm>
-            <a:off x="457200" y="457200"/>
-            <a:ext cx="11277295" cy="822960"/>
+            <a:off x="457200" y="365760"/>
+            <a:ext cx="11277295" cy="914400"/>
           </a:xfrm>
           <a:prstGeom prst="rect">
             <a:avLst/>
@@ -6288,14 +6345,14 @@
           <a:noFill/>
         </p:spPr>
         <p:txBody>
-          <a:bodyPr wrap="square" lIns="45720" rIns="45720" tIns="18288" bIns="18288">
-            <a:spAutoFit/>
+          <a:bodyPr wrap="square" anchor="ctr" lIns="0" rIns="0" tIns="0" bIns="0">
+            <a:noAutofit/>
           </a:bodyPr>
           <a:lstStyle/>
           <a:p>
             <a:pPr algn="l"/>
             <a:r>
-              <a:rPr sz="3000" b="1">
+              <a:rPr sz="2800" b="1" i="0">
                 <a:solidFill>
                   <a:srgbClr val="1F4E78"/>
                 </a:solidFill>
@@ -6313,8 +6370,8 @@
         </p:nvSpPr>
         <p:spPr>
           <a:xfrm>
-            <a:off x="457200" y="1234440"/>
-            <a:ext cx="1828800" cy="36576"/>
+            <a:off x="457200" y="1298448"/>
+            <a:ext cx="2194560" cy="36576"/>
           </a:xfrm>
           <a:prstGeom prst="rect">
             <a:avLst/>
@@ -6356,8 +6413,8 @@
         </p:nvSpPr>
         <p:spPr>
           <a:xfrm>
-            <a:off x="457200" y="1463040"/>
-            <a:ext cx="11277295" cy="640080"/>
+            <a:off x="457200" y="1508760"/>
+            <a:ext cx="11277295" cy="502920"/>
           </a:xfrm>
           <a:prstGeom prst="rect">
             <a:avLst/>
@@ -6365,14 +6422,14 @@
           <a:noFill/>
         </p:spPr>
         <p:txBody>
-          <a:bodyPr wrap="square" lIns="45720" rIns="45720" tIns="18288" bIns="18288">
-            <a:spAutoFit/>
+          <a:bodyPr wrap="square" anchor="ctr" lIns="0" rIns="0" tIns="0" bIns="0">
+            <a:noAutofit/>
           </a:bodyPr>
           <a:lstStyle/>
           <a:p>
             <a:pPr algn="l"/>
             <a:r>
-              <a:rPr sz="2200" b="1">
+              <a:rPr sz="2000" b="1" i="0">
                 <a:solidFill>
                   <a:srgbClr val="C0392B"/>
                 </a:solidFill>
@@ -6390,8 +6447,8 @@
         </p:nvSpPr>
         <p:spPr>
           <a:xfrm>
-            <a:off x="731520" y="2286000"/>
-            <a:ext cx="10728655" cy="3977640"/>
+            <a:off x="731520" y="2148840"/>
+            <a:ext cx="10728655" cy="4114800"/>
           </a:xfrm>
           <a:prstGeom prst="rect">
             <a:avLst/>
@@ -6399,8 +6456,8 @@
           <a:noFill/>
         </p:spPr>
         <p:txBody>
-          <a:bodyPr wrap="none" tIns="91440">
-            <a:spAutoFit/>
+          <a:bodyPr wrap="none" anchor="t" tIns="91440">
+            <a:noAutofit/>
           </a:bodyPr>
           <a:lstStyle/>
           <a:p>
@@ -6453,8 +6510,8 @@
         </p:nvSpPr>
         <p:spPr>
           <a:xfrm>
-            <a:off x="457200" y="457200"/>
-            <a:ext cx="11277295" cy="822960"/>
+            <a:off x="457200" y="365760"/>
+            <a:ext cx="11277295" cy="914400"/>
           </a:xfrm>
           <a:prstGeom prst="rect">
             <a:avLst/>
@@ -6462,14 +6519,14 @@
           <a:noFill/>
         </p:spPr>
         <p:txBody>
-          <a:bodyPr wrap="square" lIns="45720" rIns="45720" tIns="18288" bIns="18288">
-            <a:spAutoFit/>
+          <a:bodyPr wrap="square" anchor="ctr" lIns="0" rIns="0" tIns="0" bIns="0">
+            <a:noAutofit/>
           </a:bodyPr>
           <a:lstStyle/>
           <a:p>
             <a:pPr algn="l"/>
             <a:r>
-              <a:rPr sz="3000" b="1">
+              <a:rPr sz="2800" b="1" i="0">
                 <a:solidFill>
                   <a:srgbClr val="1F4E78"/>
                 </a:solidFill>
@@ -6487,8 +6544,8 @@
         </p:nvSpPr>
         <p:spPr>
           <a:xfrm>
-            <a:off x="457200" y="1234440"/>
-            <a:ext cx="1828800" cy="36576"/>
+            <a:off x="457200" y="1298448"/>
+            <a:ext cx="2194560" cy="36576"/>
           </a:xfrm>
           <a:prstGeom prst="rect">
             <a:avLst/>
@@ -6530,8 +6587,8 @@
         </p:nvSpPr>
         <p:spPr>
           <a:xfrm>
-            <a:off x="457200" y="1463040"/>
-            <a:ext cx="11277295" cy="640080"/>
+            <a:off x="457200" y="1508760"/>
+            <a:ext cx="11277295" cy="502920"/>
           </a:xfrm>
           <a:prstGeom prst="rect">
             <a:avLst/>
@@ -6539,14 +6596,14 @@
           <a:noFill/>
         </p:spPr>
         <p:txBody>
-          <a:bodyPr wrap="square" lIns="45720" rIns="45720" tIns="18288" bIns="18288">
-            <a:spAutoFit/>
+          <a:bodyPr wrap="square" anchor="ctr" lIns="0" rIns="0" tIns="0" bIns="0">
+            <a:noAutofit/>
           </a:bodyPr>
           <a:lstStyle/>
           <a:p>
             <a:pPr algn="l"/>
             <a:r>
-              <a:rPr sz="2200" b="1">
+              <a:rPr sz="2000" b="1" i="0">
                 <a:solidFill>
                   <a:srgbClr val="C0392B"/>
                 </a:solidFill>
@@ -6564,8 +6621,8 @@
         </p:nvSpPr>
         <p:spPr>
           <a:xfrm>
-            <a:off x="640080" y="2286000"/>
-            <a:ext cx="10911535" cy="4069080"/>
+            <a:off x="640080" y="2148840"/>
+            <a:ext cx="10911535" cy="4114800"/>
           </a:xfrm>
           <a:prstGeom prst="rect">
             <a:avLst/>
@@ -6573,15 +6630,18 @@
           <a:noFill/>
         </p:spPr>
         <p:txBody>
-          <a:bodyPr wrap="square" lIns="45720" rIns="45720">
-            <a:spAutoFit/>
+          <a:bodyPr wrap="square" anchor="t" lIns="0" rIns="0" tIns="0" bIns="0">
+            <a:noAutofit/>
           </a:bodyPr>
           <a:lstStyle/>
           <a:p>
             <a:pPr algn="l">
               <a:lnSpc>
-                <a:spcPct val="130000"/>
+                <a:spcPct val="135000"/>
               </a:lnSpc>
+              <a:spcAft>
+                <a:spcPts val="600"/>
+              </a:spcAft>
             </a:pPr>
             <a:r>
               <a:rPr sz="1800">
@@ -6595,8 +6655,11 @@
           <a:p>
             <a:pPr algn="l">
               <a:lnSpc>
-                <a:spcPct val="130000"/>
+                <a:spcPct val="135000"/>
               </a:lnSpc>
+              <a:spcAft>
+                <a:spcPts val="600"/>
+              </a:spcAft>
             </a:pPr>
             <a:r>
               <a:rPr sz="1800">
@@ -6610,8 +6673,11 @@
           <a:p>
             <a:pPr algn="l">
               <a:lnSpc>
-                <a:spcPct val="130000"/>
+                <a:spcPct val="135000"/>
               </a:lnSpc>
+              <a:spcAft>
+                <a:spcPts val="600"/>
+              </a:spcAft>
             </a:pPr>
             <a:r>
               <a:rPr sz="1800">
@@ -6625,8 +6691,11 @@
           <a:p>
             <a:pPr algn="l">
               <a:lnSpc>
-                <a:spcPct val="130000"/>
+                <a:spcPct val="135000"/>
               </a:lnSpc>
+              <a:spcAft>
+                <a:spcPts val="600"/>
+              </a:spcAft>
             </a:pPr>
             <a:r>
               <a:rPr sz="1800">
@@ -6665,8 +6734,8 @@
         </p:nvSpPr>
         <p:spPr>
           <a:xfrm>
-            <a:off x="457200" y="457200"/>
-            <a:ext cx="11277295" cy="822960"/>
+            <a:off x="457200" y="365760"/>
+            <a:ext cx="11277295" cy="914400"/>
           </a:xfrm>
           <a:prstGeom prst="rect">
             <a:avLst/>
@@ -6674,14 +6743,14 @@
           <a:noFill/>
         </p:spPr>
         <p:txBody>
-          <a:bodyPr wrap="square" lIns="45720" rIns="45720" tIns="18288" bIns="18288">
-            <a:spAutoFit/>
+          <a:bodyPr wrap="square" anchor="ctr" lIns="0" rIns="0" tIns="0" bIns="0">
+            <a:noAutofit/>
           </a:bodyPr>
           <a:lstStyle/>
           <a:p>
             <a:pPr algn="l"/>
             <a:r>
-              <a:rPr sz="3000" b="1">
+              <a:rPr sz="2800" b="1" i="0">
                 <a:solidFill>
                   <a:srgbClr val="1F4E78"/>
                 </a:solidFill>
@@ -6699,8 +6768,8 @@
         </p:nvSpPr>
         <p:spPr>
           <a:xfrm>
-            <a:off x="457200" y="1234440"/>
-            <a:ext cx="1828800" cy="36576"/>
+            <a:off x="457200" y="1298448"/>
+            <a:ext cx="2194560" cy="36576"/>
           </a:xfrm>
           <a:prstGeom prst="rect">
             <a:avLst/>
@@ -6742,8 +6811,8 @@
         </p:nvSpPr>
         <p:spPr>
           <a:xfrm>
-            <a:off x="457200" y="1463040"/>
-            <a:ext cx="11277295" cy="640080"/>
+            <a:off x="457200" y="1508760"/>
+            <a:ext cx="11277295" cy="502920"/>
           </a:xfrm>
           <a:prstGeom prst="rect">
             <a:avLst/>
@@ -6751,14 +6820,14 @@
           <a:noFill/>
         </p:spPr>
         <p:txBody>
-          <a:bodyPr wrap="square" lIns="45720" rIns="45720" tIns="18288" bIns="18288">
-            <a:spAutoFit/>
+          <a:bodyPr wrap="square" anchor="ctr" lIns="0" rIns="0" tIns="0" bIns="0">
+            <a:noAutofit/>
           </a:bodyPr>
           <a:lstStyle/>
           <a:p>
             <a:pPr algn="l"/>
             <a:r>
-              <a:rPr sz="2200" b="1">
+              <a:rPr sz="2000" b="1" i="0">
                 <a:solidFill>
                   <a:srgbClr val="C0392B"/>
                 </a:solidFill>
@@ -6777,7 +6846,7 @@
           <p:nvPr/>
         </p:nvGraphicFramePr>
         <p:xfrm>
-          <a:off x="457200" y="2286000"/>
+          <a:off x="457200" y="2148840"/>
           <a:ext cx="11277295" cy="1828800"/>
         </p:xfrm>
         <a:graphic>
@@ -7084,14 +7153,14 @@
           <a:noFill/>
         </p:spPr>
         <p:txBody>
-          <a:bodyPr wrap="square" lIns="45720" rIns="45720" tIns="18288" bIns="18288">
-            <a:spAutoFit/>
+          <a:bodyPr wrap="square" anchor="ctr" lIns="0" rIns="0" tIns="0" bIns="0">
+            <a:noAutofit/>
           </a:bodyPr>
           <a:lstStyle/>
           <a:p>
             <a:pPr algn="l"/>
             <a:r>
-              <a:rPr sz="1100" b="0">
+              <a:rPr sz="1100" b="0" i="1">
                 <a:solidFill>
                   <a:srgbClr val="808080"/>
                 </a:solidFill>
@@ -7127,8 +7196,8 @@
         </p:nvSpPr>
         <p:spPr>
           <a:xfrm>
-            <a:off x="457200" y="457200"/>
-            <a:ext cx="11277295" cy="822960"/>
+            <a:off x="457200" y="365760"/>
+            <a:ext cx="11277295" cy="914400"/>
           </a:xfrm>
           <a:prstGeom prst="rect">
             <a:avLst/>
@@ -7136,14 +7205,14 @@
           <a:noFill/>
         </p:spPr>
         <p:txBody>
-          <a:bodyPr wrap="square" lIns="45720" rIns="45720" tIns="18288" bIns="18288">
-            <a:spAutoFit/>
+          <a:bodyPr wrap="square" anchor="ctr" lIns="0" rIns="0" tIns="0" bIns="0">
+            <a:noAutofit/>
           </a:bodyPr>
           <a:lstStyle/>
           <a:p>
             <a:pPr algn="l"/>
             <a:r>
-              <a:rPr sz="3000" b="1">
+              <a:rPr sz="2800" b="1" i="0">
                 <a:solidFill>
                   <a:srgbClr val="1F4E78"/>
                 </a:solidFill>
@@ -7161,8 +7230,8 @@
         </p:nvSpPr>
         <p:spPr>
           <a:xfrm>
-            <a:off x="457200" y="1234440"/>
-            <a:ext cx="1828800" cy="36576"/>
+            <a:off x="457200" y="1298448"/>
+            <a:ext cx="2194560" cy="36576"/>
           </a:xfrm>
           <a:prstGeom prst="rect">
             <a:avLst/>
@@ -7204,8 +7273,8 @@
         </p:nvSpPr>
         <p:spPr>
           <a:xfrm>
-            <a:off x="457200" y="1463040"/>
-            <a:ext cx="11277295" cy="640080"/>
+            <a:off x="457200" y="1508760"/>
+            <a:ext cx="11277295" cy="502920"/>
           </a:xfrm>
           <a:prstGeom prst="rect">
             <a:avLst/>
@@ -7213,14 +7282,14 @@
           <a:noFill/>
         </p:spPr>
         <p:txBody>
-          <a:bodyPr wrap="square" lIns="45720" rIns="45720" tIns="18288" bIns="18288">
-            <a:spAutoFit/>
+          <a:bodyPr wrap="square" anchor="ctr" lIns="0" rIns="0" tIns="0" bIns="0">
+            <a:noAutofit/>
           </a:bodyPr>
           <a:lstStyle/>
           <a:p>
             <a:pPr algn="l"/>
             <a:r>
-              <a:rPr sz="2200" b="1">
+              <a:rPr sz="2000" b="1" i="0">
                 <a:solidFill>
                   <a:srgbClr val="C0392B"/>
                 </a:solidFill>
@@ -7239,7 +7308,7 @@
           <p:nvPr/>
         </p:nvGraphicFramePr>
         <p:xfrm>
-          <a:off x="457200" y="2286000"/>
+          <a:off x="457200" y="2148840"/>
           <a:ext cx="11277295" cy="1828800"/>
         </p:xfrm>
         <a:graphic>
@@ -7546,14 +7615,14 @@
           <a:noFill/>
         </p:spPr>
         <p:txBody>
-          <a:bodyPr wrap="square" lIns="45720" rIns="45720" tIns="18288" bIns="18288">
-            <a:spAutoFit/>
+          <a:bodyPr wrap="square" anchor="ctr" lIns="0" rIns="0" tIns="0" bIns="0">
+            <a:noAutofit/>
           </a:bodyPr>
           <a:lstStyle/>
           <a:p>
             <a:pPr algn="l"/>
             <a:r>
-              <a:rPr sz="1100" b="0">
+              <a:rPr sz="1100" b="0" i="1">
                 <a:solidFill>
                   <a:srgbClr val="808080"/>
                 </a:solidFill>
@@ -7589,8 +7658,8 @@
         </p:nvSpPr>
         <p:spPr>
           <a:xfrm>
-            <a:off x="457200" y="457200"/>
-            <a:ext cx="11277295" cy="822960"/>
+            <a:off x="457200" y="365760"/>
+            <a:ext cx="11277295" cy="914400"/>
           </a:xfrm>
           <a:prstGeom prst="rect">
             <a:avLst/>
@@ -7598,14 +7667,14 @@
           <a:noFill/>
         </p:spPr>
         <p:txBody>
-          <a:bodyPr wrap="square" lIns="45720" rIns="45720" tIns="18288" bIns="18288">
-            <a:spAutoFit/>
+          <a:bodyPr wrap="square" anchor="ctr" lIns="0" rIns="0" tIns="0" bIns="0">
+            <a:noAutofit/>
           </a:bodyPr>
           <a:lstStyle/>
           <a:p>
             <a:pPr algn="l"/>
             <a:r>
-              <a:rPr sz="3000" b="1">
+              <a:rPr sz="2800" b="1" i="0">
                 <a:solidFill>
                   <a:srgbClr val="1F4E78"/>
                 </a:solidFill>
@@ -7623,8 +7692,8 @@
         </p:nvSpPr>
         <p:spPr>
           <a:xfrm>
-            <a:off x="457200" y="1234440"/>
-            <a:ext cx="1828800" cy="36576"/>
+            <a:off x="457200" y="1298448"/>
+            <a:ext cx="2194560" cy="36576"/>
           </a:xfrm>
           <a:prstGeom prst="rect">
             <a:avLst/>
@@ -7666,8 +7735,8 @@
         </p:nvSpPr>
         <p:spPr>
           <a:xfrm>
-            <a:off x="822960" y="1463040"/>
-            <a:ext cx="10545775" cy="4892040"/>
+            <a:off x="822960" y="2148840"/>
+            <a:ext cx="10545775" cy="4114800"/>
           </a:xfrm>
           <a:prstGeom prst="rect">
             <a:avLst/>
@@ -7675,15 +7744,18 @@
           <a:noFill/>
         </p:spPr>
         <p:txBody>
-          <a:bodyPr wrap="square" lIns="45720" rIns="45720">
-            <a:spAutoFit/>
+          <a:bodyPr wrap="square" anchor="t" lIns="0" rIns="0" tIns="0" bIns="0">
+            <a:noAutofit/>
           </a:bodyPr>
           <a:lstStyle/>
           <a:p>
             <a:pPr algn="l">
               <a:lnSpc>
-                <a:spcPct val="130000"/>
+                <a:spcPct val="135000"/>
               </a:lnSpc>
+              <a:spcAft>
+                <a:spcPts val="600"/>
+              </a:spcAft>
             </a:pPr>
             <a:r>
               <a:rPr sz="2200">
@@ -7774,14 +7846,14 @@
           <a:noFill/>
         </p:spPr>
         <p:txBody>
-          <a:bodyPr wrap="square" lIns="45720" rIns="45720" tIns="18288" bIns="18288">
-            <a:spAutoFit/>
+          <a:bodyPr wrap="square" anchor="ctr" lIns="0" rIns="0" tIns="0" bIns="0">
+            <a:noAutofit/>
           </a:bodyPr>
           <a:lstStyle/>
           <a:p>
             <a:pPr algn="ctr"/>
             <a:r>
-              <a:rPr sz="5800" b="1">
+              <a:rPr sz="5800" b="1" i="0">
                 <a:solidFill>
                   <a:srgbClr val="FFFFFF"/>
                 </a:solidFill>
@@ -7817,8 +7889,8 @@
         </p:nvSpPr>
         <p:spPr>
           <a:xfrm>
-            <a:off x="457200" y="457200"/>
-            <a:ext cx="11277295" cy="822960"/>
+            <a:off x="457200" y="365760"/>
+            <a:ext cx="11277295" cy="914400"/>
           </a:xfrm>
           <a:prstGeom prst="rect">
             <a:avLst/>
@@ -7826,14 +7898,14 @@
           <a:noFill/>
         </p:spPr>
         <p:txBody>
-          <a:bodyPr wrap="square" lIns="45720" rIns="45720" tIns="18288" bIns="18288">
-            <a:spAutoFit/>
+          <a:bodyPr wrap="square" anchor="ctr" lIns="0" rIns="0" tIns="0" bIns="0">
+            <a:noAutofit/>
           </a:bodyPr>
           <a:lstStyle/>
           <a:p>
             <a:pPr algn="l"/>
             <a:r>
-              <a:rPr sz="3000" b="1">
+              <a:rPr sz="2800" b="1" i="0">
                 <a:solidFill>
                   <a:srgbClr val="1F4E78"/>
                 </a:solidFill>
@@ -7851,8 +7923,8 @@
         </p:nvSpPr>
         <p:spPr>
           <a:xfrm>
-            <a:off x="457200" y="1234440"/>
-            <a:ext cx="1828800" cy="36576"/>
+            <a:off x="457200" y="1298448"/>
+            <a:ext cx="2194560" cy="36576"/>
           </a:xfrm>
           <a:prstGeom prst="rect">
             <a:avLst/>
@@ -7894,8 +7966,8 @@
         </p:nvSpPr>
         <p:spPr>
           <a:xfrm>
-            <a:off x="457200" y="1463040"/>
-            <a:ext cx="11277295" cy="640080"/>
+            <a:off x="457200" y="1508760"/>
+            <a:ext cx="11277295" cy="502920"/>
           </a:xfrm>
           <a:prstGeom prst="rect">
             <a:avLst/>
@@ -7903,14 +7975,14 @@
           <a:noFill/>
         </p:spPr>
         <p:txBody>
-          <a:bodyPr wrap="square" lIns="45720" rIns="45720" tIns="18288" bIns="18288">
-            <a:spAutoFit/>
+          <a:bodyPr wrap="square" anchor="ctr" lIns="0" rIns="0" tIns="0" bIns="0">
+            <a:noAutofit/>
           </a:bodyPr>
           <a:lstStyle/>
           <a:p>
             <a:pPr algn="l"/>
             <a:r>
-              <a:rPr sz="2200" b="1">
+              <a:rPr sz="2000" b="1" i="0">
                 <a:solidFill>
                   <a:srgbClr val="C0392B"/>
                 </a:solidFill>
@@ -7928,8 +8000,8 @@
         </p:nvSpPr>
         <p:spPr>
           <a:xfrm>
-            <a:off x="731520" y="2286000"/>
-            <a:ext cx="10728655" cy="3977640"/>
+            <a:off x="731520" y="2148840"/>
+            <a:ext cx="10728655" cy="4114800"/>
           </a:xfrm>
           <a:prstGeom prst="rect">
             <a:avLst/>
@@ -7937,8 +8009,8 @@
           <a:noFill/>
         </p:spPr>
         <p:txBody>
-          <a:bodyPr wrap="none" tIns="91440">
-            <a:spAutoFit/>
+          <a:bodyPr wrap="none" anchor="t" tIns="91440">
+            <a:noAutofit/>
           </a:bodyPr>
           <a:lstStyle/>
           <a:p>
@@ -7991,8 +8063,8 @@
         </p:nvSpPr>
         <p:spPr>
           <a:xfrm>
-            <a:off x="457200" y="457200"/>
-            <a:ext cx="11277295" cy="822960"/>
+            <a:off x="457200" y="365760"/>
+            <a:ext cx="11277295" cy="914400"/>
           </a:xfrm>
           <a:prstGeom prst="rect">
             <a:avLst/>
@@ -8000,14 +8072,14 @@
           <a:noFill/>
         </p:spPr>
         <p:txBody>
-          <a:bodyPr wrap="square" lIns="45720" rIns="45720" tIns="18288" bIns="18288">
-            <a:spAutoFit/>
+          <a:bodyPr wrap="square" anchor="ctr" lIns="0" rIns="0" tIns="0" bIns="0">
+            <a:noAutofit/>
           </a:bodyPr>
           <a:lstStyle/>
           <a:p>
             <a:pPr algn="l"/>
             <a:r>
-              <a:rPr sz="3000" b="1">
+              <a:rPr sz="2800" b="1" i="0">
                 <a:solidFill>
                   <a:srgbClr val="1F4E78"/>
                 </a:solidFill>
@@ -8025,8 +8097,8 @@
         </p:nvSpPr>
         <p:spPr>
           <a:xfrm>
-            <a:off x="457200" y="1234440"/>
-            <a:ext cx="1828800" cy="36576"/>
+            <a:off x="457200" y="1298448"/>
+            <a:ext cx="2194560" cy="36576"/>
           </a:xfrm>
           <a:prstGeom prst="rect">
             <a:avLst/>
@@ -8068,8 +8140,8 @@
         </p:nvSpPr>
         <p:spPr>
           <a:xfrm>
-            <a:off x="457200" y="1463040"/>
-            <a:ext cx="11277295" cy="640080"/>
+            <a:off x="457200" y="1508760"/>
+            <a:ext cx="11277295" cy="502920"/>
           </a:xfrm>
           <a:prstGeom prst="rect">
             <a:avLst/>
@@ -8077,14 +8149,14 @@
           <a:noFill/>
         </p:spPr>
         <p:txBody>
-          <a:bodyPr wrap="square" lIns="45720" rIns="45720" tIns="18288" bIns="18288">
-            <a:spAutoFit/>
+          <a:bodyPr wrap="square" anchor="ctr" lIns="0" rIns="0" tIns="0" bIns="0">
+            <a:noAutofit/>
           </a:bodyPr>
           <a:lstStyle/>
           <a:p>
             <a:pPr algn="l"/>
             <a:r>
-              <a:rPr sz="2200" b="1">
+              <a:rPr sz="2000" b="1" i="0">
                 <a:solidFill>
                   <a:srgbClr val="C0392B"/>
                 </a:solidFill>
@@ -8102,8 +8174,8 @@
         </p:nvSpPr>
         <p:spPr>
           <a:xfrm>
-            <a:off x="640080" y="2286000"/>
-            <a:ext cx="10911535" cy="4069080"/>
+            <a:off x="640080" y="2148840"/>
+            <a:ext cx="10911535" cy="4114800"/>
           </a:xfrm>
           <a:prstGeom prst="rect">
             <a:avLst/>
@@ -8111,15 +8183,18 @@
           <a:noFill/>
         </p:spPr>
         <p:txBody>
-          <a:bodyPr wrap="square" lIns="45720" rIns="45720">
-            <a:spAutoFit/>
+          <a:bodyPr wrap="square" anchor="t" lIns="0" rIns="0" tIns="0" bIns="0">
+            <a:noAutofit/>
           </a:bodyPr>
           <a:lstStyle/>
           <a:p>
             <a:pPr algn="l">
               <a:lnSpc>
-                <a:spcPct val="130000"/>
+                <a:spcPct val="135000"/>
               </a:lnSpc>
+              <a:spcAft>
+                <a:spcPts val="600"/>
+              </a:spcAft>
             </a:pPr>
             <a:r>
               <a:rPr sz="1800">
@@ -8133,8 +8208,11 @@
           <a:p>
             <a:pPr algn="l">
               <a:lnSpc>
-                <a:spcPct val="130000"/>
+                <a:spcPct val="135000"/>
               </a:lnSpc>
+              <a:spcAft>
+                <a:spcPts val="600"/>
+              </a:spcAft>
             </a:pPr>
             <a:r>
               <a:rPr sz="1800">
@@ -8148,8 +8226,11 @@
           <a:p>
             <a:pPr algn="l">
               <a:lnSpc>
-                <a:spcPct val="130000"/>
+                <a:spcPct val="135000"/>
               </a:lnSpc>
+              <a:spcAft>
+                <a:spcPts val="600"/>
+              </a:spcAft>
             </a:pPr>
             <a:r>
               <a:rPr sz="1800">
@@ -8163,8 +8244,11 @@
           <a:p>
             <a:pPr algn="l">
               <a:lnSpc>
-                <a:spcPct val="130000"/>
+                <a:spcPct val="135000"/>
               </a:lnSpc>
+              <a:spcAft>
+                <a:spcPts val="600"/>
+              </a:spcAft>
             </a:pPr>
             <a:r>
               <a:rPr sz="1800">
@@ -8203,8 +8287,8 @@
         </p:nvSpPr>
         <p:spPr>
           <a:xfrm>
-            <a:off x="457200" y="457200"/>
-            <a:ext cx="11277295" cy="822960"/>
+            <a:off x="457200" y="365760"/>
+            <a:ext cx="11277295" cy="914400"/>
           </a:xfrm>
           <a:prstGeom prst="rect">
             <a:avLst/>
@@ -8212,14 +8296,14 @@
           <a:noFill/>
         </p:spPr>
         <p:txBody>
-          <a:bodyPr wrap="square" lIns="45720" rIns="45720" tIns="18288" bIns="18288">
-            <a:spAutoFit/>
+          <a:bodyPr wrap="square" anchor="ctr" lIns="0" rIns="0" tIns="0" bIns="0">
+            <a:noAutofit/>
           </a:bodyPr>
           <a:lstStyle/>
           <a:p>
             <a:pPr algn="l"/>
             <a:r>
-              <a:rPr sz="3000" b="1">
+              <a:rPr sz="2800" b="1" i="0">
                 <a:solidFill>
                   <a:srgbClr val="1F4E78"/>
                 </a:solidFill>
@@ -8237,8 +8321,8 @@
         </p:nvSpPr>
         <p:spPr>
           <a:xfrm>
-            <a:off x="457200" y="1234440"/>
-            <a:ext cx="1828800" cy="36576"/>
+            <a:off x="457200" y="1298448"/>
+            <a:ext cx="2194560" cy="36576"/>
           </a:xfrm>
           <a:prstGeom prst="rect">
             <a:avLst/>
@@ -8280,8 +8364,8 @@
         </p:nvSpPr>
         <p:spPr>
           <a:xfrm>
-            <a:off x="457200" y="1463040"/>
-            <a:ext cx="11277295" cy="640080"/>
+            <a:off x="457200" y="1508760"/>
+            <a:ext cx="11277295" cy="502920"/>
           </a:xfrm>
           <a:prstGeom prst="rect">
             <a:avLst/>
@@ -8289,14 +8373,14 @@
           <a:noFill/>
         </p:spPr>
         <p:txBody>
-          <a:bodyPr wrap="square" lIns="45720" rIns="45720" tIns="18288" bIns="18288">
-            <a:spAutoFit/>
+          <a:bodyPr wrap="square" anchor="ctr" lIns="0" rIns="0" tIns="0" bIns="0">
+            <a:noAutofit/>
           </a:bodyPr>
           <a:lstStyle/>
           <a:p>
             <a:pPr algn="l"/>
             <a:r>
-              <a:rPr sz="2200" b="1">
+              <a:rPr sz="2000" b="1" i="0">
                 <a:solidFill>
                   <a:srgbClr val="C0392B"/>
                 </a:solidFill>
@@ -8314,8 +8398,8 @@
         </p:nvSpPr>
         <p:spPr>
           <a:xfrm>
-            <a:off x="731520" y="2286000"/>
-            <a:ext cx="10728655" cy="3977640"/>
+            <a:off x="731520" y="2148840"/>
+            <a:ext cx="10728655" cy="4114800"/>
           </a:xfrm>
           <a:prstGeom prst="rect">
             <a:avLst/>
@@ -8323,8 +8407,8 @@
           <a:noFill/>
         </p:spPr>
         <p:txBody>
-          <a:bodyPr wrap="none" tIns="91440">
-            <a:spAutoFit/>
+          <a:bodyPr wrap="none" anchor="t" tIns="91440">
+            <a:noAutofit/>
           </a:bodyPr>
           <a:lstStyle/>
           <a:p>
@@ -8378,8 +8462,8 @@
         </p:nvSpPr>
         <p:spPr>
           <a:xfrm>
-            <a:off x="457200" y="457200"/>
-            <a:ext cx="11277295" cy="822960"/>
+            <a:off x="457200" y="365760"/>
+            <a:ext cx="11277295" cy="914400"/>
           </a:xfrm>
           <a:prstGeom prst="rect">
             <a:avLst/>
@@ -8387,14 +8471,14 @@
           <a:noFill/>
         </p:spPr>
         <p:txBody>
-          <a:bodyPr wrap="square" lIns="45720" rIns="45720" tIns="18288" bIns="18288">
-            <a:spAutoFit/>
+          <a:bodyPr wrap="square" anchor="ctr" lIns="0" rIns="0" tIns="0" bIns="0">
+            <a:noAutofit/>
           </a:bodyPr>
           <a:lstStyle/>
           <a:p>
             <a:pPr algn="l"/>
             <a:r>
-              <a:rPr sz="3000" b="1">
+              <a:rPr sz="2800" b="1" i="0">
                 <a:solidFill>
                   <a:srgbClr val="1F4E78"/>
                 </a:solidFill>
@@ -8412,8 +8496,8 @@
         </p:nvSpPr>
         <p:spPr>
           <a:xfrm>
-            <a:off x="457200" y="1234440"/>
-            <a:ext cx="1828800" cy="36576"/>
+            <a:off x="457200" y="1298448"/>
+            <a:ext cx="2194560" cy="36576"/>
           </a:xfrm>
           <a:prstGeom prst="rect">
             <a:avLst/>
@@ -8455,8 +8539,8 @@
         </p:nvSpPr>
         <p:spPr>
           <a:xfrm>
-            <a:off x="457200" y="1463040"/>
-            <a:ext cx="11277295" cy="640080"/>
+            <a:off x="457200" y="1508760"/>
+            <a:ext cx="11277295" cy="502920"/>
           </a:xfrm>
           <a:prstGeom prst="rect">
             <a:avLst/>
@@ -8464,14 +8548,14 @@
           <a:noFill/>
         </p:spPr>
         <p:txBody>
-          <a:bodyPr wrap="square" lIns="45720" rIns="45720" tIns="18288" bIns="18288">
-            <a:spAutoFit/>
+          <a:bodyPr wrap="square" anchor="ctr" lIns="0" rIns="0" tIns="0" bIns="0">
+            <a:noAutofit/>
           </a:bodyPr>
           <a:lstStyle/>
           <a:p>
             <a:pPr algn="l"/>
             <a:r>
-              <a:rPr sz="2200" b="1">
+              <a:rPr sz="2000" b="1" i="0">
                 <a:solidFill>
                   <a:srgbClr val="C0392B"/>
                 </a:solidFill>
@@ -8489,8 +8573,8 @@
         </p:nvSpPr>
         <p:spPr>
           <a:xfrm>
-            <a:off x="640080" y="2286000"/>
-            <a:ext cx="10911535" cy="4069080"/>
+            <a:off x="640080" y="2148840"/>
+            <a:ext cx="10911535" cy="4114800"/>
           </a:xfrm>
           <a:prstGeom prst="rect">
             <a:avLst/>
@@ -8498,15 +8582,18 @@
           <a:noFill/>
         </p:spPr>
         <p:txBody>
-          <a:bodyPr wrap="square" lIns="45720" rIns="45720">
-            <a:spAutoFit/>
+          <a:bodyPr wrap="square" anchor="t" lIns="0" rIns="0" tIns="0" bIns="0">
+            <a:noAutofit/>
           </a:bodyPr>
           <a:lstStyle/>
           <a:p>
             <a:pPr algn="l">
               <a:lnSpc>
-                <a:spcPct val="130000"/>
+                <a:spcPct val="135000"/>
               </a:lnSpc>
+              <a:spcAft>
+                <a:spcPts val="600"/>
+              </a:spcAft>
             </a:pPr>
             <a:r>
               <a:rPr sz="1800">
@@ -8520,8 +8607,11 @@
           <a:p>
             <a:pPr algn="l">
               <a:lnSpc>
-                <a:spcPct val="130000"/>
+                <a:spcPct val="135000"/>
               </a:lnSpc>
+              <a:spcAft>
+                <a:spcPts val="600"/>
+              </a:spcAft>
             </a:pPr>
             <a:r>
               <a:rPr sz="1800">
@@ -8535,8 +8625,11 @@
           <a:p>
             <a:pPr algn="l">
               <a:lnSpc>
-                <a:spcPct val="130000"/>
+                <a:spcPct val="135000"/>
               </a:lnSpc>
+              <a:spcAft>
+                <a:spcPts val="600"/>
+              </a:spcAft>
             </a:pPr>
             <a:r>
               <a:rPr sz="1800">
@@ -8575,8 +8668,8 @@
         </p:nvSpPr>
         <p:spPr>
           <a:xfrm>
-            <a:off x="457200" y="457200"/>
-            <a:ext cx="11277295" cy="822960"/>
+            <a:off x="457200" y="365760"/>
+            <a:ext cx="11277295" cy="914400"/>
           </a:xfrm>
           <a:prstGeom prst="rect">
             <a:avLst/>
@@ -8584,14 +8677,14 @@
           <a:noFill/>
         </p:spPr>
         <p:txBody>
-          <a:bodyPr wrap="square" lIns="45720" rIns="45720" tIns="18288" bIns="18288">
-            <a:spAutoFit/>
+          <a:bodyPr wrap="square" anchor="ctr" lIns="0" rIns="0" tIns="0" bIns="0">
+            <a:noAutofit/>
           </a:bodyPr>
           <a:lstStyle/>
           <a:p>
             <a:pPr algn="l"/>
             <a:r>
-              <a:rPr sz="3000" b="1">
+              <a:rPr sz="2800" b="1" i="0">
                 <a:solidFill>
                   <a:srgbClr val="1F4E78"/>
                 </a:solidFill>
@@ -8609,8 +8702,8 @@
         </p:nvSpPr>
         <p:spPr>
           <a:xfrm>
-            <a:off x="457200" y="1234440"/>
-            <a:ext cx="1828800" cy="36576"/>
+            <a:off x="457200" y="1298448"/>
+            <a:ext cx="2194560" cy="36576"/>
           </a:xfrm>
           <a:prstGeom prst="rect">
             <a:avLst/>
@@ -8652,8 +8745,8 @@
         </p:nvSpPr>
         <p:spPr>
           <a:xfrm>
-            <a:off x="457200" y="1463040"/>
-            <a:ext cx="11277295" cy="640080"/>
+            <a:off x="457200" y="1508760"/>
+            <a:ext cx="11277295" cy="502920"/>
           </a:xfrm>
           <a:prstGeom prst="rect">
             <a:avLst/>
@@ -8661,14 +8754,14 @@
           <a:noFill/>
         </p:spPr>
         <p:txBody>
-          <a:bodyPr wrap="square" lIns="45720" rIns="45720" tIns="18288" bIns="18288">
-            <a:spAutoFit/>
+          <a:bodyPr wrap="square" anchor="ctr" lIns="0" rIns="0" tIns="0" bIns="0">
+            <a:noAutofit/>
           </a:bodyPr>
           <a:lstStyle/>
           <a:p>
             <a:pPr algn="l"/>
             <a:r>
-              <a:rPr sz="2200" b="1">
+              <a:rPr sz="2000" b="1" i="0">
                 <a:solidFill>
                   <a:srgbClr val="C0392B"/>
                 </a:solidFill>
@@ -8686,8 +8779,8 @@
         </p:nvSpPr>
         <p:spPr>
           <a:xfrm>
-            <a:off x="731520" y="2286000"/>
-            <a:ext cx="10728655" cy="3977640"/>
+            <a:off x="731520" y="2148840"/>
+            <a:ext cx="10728655" cy="4114800"/>
           </a:xfrm>
           <a:prstGeom prst="rect">
             <a:avLst/>
@@ -8695,8 +8788,8 @@
           <a:noFill/>
         </p:spPr>
         <p:txBody>
-          <a:bodyPr wrap="none" tIns="91440">
-            <a:spAutoFit/>
+          <a:bodyPr wrap="none" anchor="t" tIns="91440">
+            <a:noAutofit/>
           </a:bodyPr>
           <a:lstStyle/>
           <a:p>
@@ -8748,8 +8841,8 @@
         </p:nvSpPr>
         <p:spPr>
           <a:xfrm>
-            <a:off x="457200" y="457200"/>
-            <a:ext cx="11277295" cy="822960"/>
+            <a:off x="457200" y="365760"/>
+            <a:ext cx="11277295" cy="914400"/>
           </a:xfrm>
           <a:prstGeom prst="rect">
             <a:avLst/>
@@ -8757,14 +8850,14 @@
           <a:noFill/>
         </p:spPr>
         <p:txBody>
-          <a:bodyPr wrap="square" lIns="45720" rIns="45720" tIns="18288" bIns="18288">
-            <a:spAutoFit/>
+          <a:bodyPr wrap="square" anchor="ctr" lIns="0" rIns="0" tIns="0" bIns="0">
+            <a:noAutofit/>
           </a:bodyPr>
           <a:lstStyle/>
           <a:p>
             <a:pPr algn="l"/>
             <a:r>
-              <a:rPr sz="3000" b="1">
+              <a:rPr sz="2800" b="1" i="0">
                 <a:solidFill>
                   <a:srgbClr val="1F4E78"/>
                 </a:solidFill>
@@ -8782,8 +8875,8 @@
         </p:nvSpPr>
         <p:spPr>
           <a:xfrm>
-            <a:off x="457200" y="1234440"/>
-            <a:ext cx="1828800" cy="36576"/>
+            <a:off x="457200" y="1298448"/>
+            <a:ext cx="2194560" cy="36576"/>
           </a:xfrm>
           <a:prstGeom prst="rect">
             <a:avLst/>
@@ -8825,8 +8918,8 @@
         </p:nvSpPr>
         <p:spPr>
           <a:xfrm>
-            <a:off x="457200" y="1463040"/>
-            <a:ext cx="11277295" cy="640080"/>
+            <a:off x="457200" y="1508760"/>
+            <a:ext cx="11277295" cy="502920"/>
           </a:xfrm>
           <a:prstGeom prst="rect">
             <a:avLst/>
@@ -8834,14 +8927,14 @@
           <a:noFill/>
         </p:spPr>
         <p:txBody>
-          <a:bodyPr wrap="square" lIns="45720" rIns="45720" tIns="18288" bIns="18288">
-            <a:spAutoFit/>
+          <a:bodyPr wrap="square" anchor="ctr" lIns="0" rIns="0" tIns="0" bIns="0">
+            <a:noAutofit/>
           </a:bodyPr>
           <a:lstStyle/>
           <a:p>
             <a:pPr algn="l"/>
             <a:r>
-              <a:rPr sz="2200" b="1">
+              <a:rPr sz="2000" b="1" i="0">
                 <a:solidFill>
                   <a:srgbClr val="C0392B"/>
                 </a:solidFill>
@@ -8860,7 +8953,7 @@
           <p:nvPr/>
         </p:nvGraphicFramePr>
         <p:xfrm>
-          <a:off x="457200" y="2286000"/>
+          <a:off x="457200" y="2148840"/>
           <a:ext cx="11277295" cy="1828800"/>
         </p:xfrm>
         <a:graphic>
@@ -9078,14 +9171,14 @@
           <a:noFill/>
         </p:spPr>
         <p:txBody>
-          <a:bodyPr wrap="square" lIns="45720" rIns="45720" tIns="18288" bIns="18288">
-            <a:spAutoFit/>
+          <a:bodyPr wrap="square" anchor="ctr" lIns="0" rIns="0" tIns="0" bIns="0">
+            <a:noAutofit/>
           </a:bodyPr>
           <a:lstStyle/>
           <a:p>
             <a:pPr algn="l"/>
             <a:r>
-              <a:rPr sz="1100" b="0">
+              <a:rPr sz="1100" b="0" i="1">
                 <a:solidFill>
                   <a:srgbClr val="808080"/>
                 </a:solidFill>
@@ -9121,8 +9214,8 @@
         </p:nvSpPr>
         <p:spPr>
           <a:xfrm>
-            <a:off x="457200" y="457200"/>
-            <a:ext cx="11277295" cy="822960"/>
+            <a:off x="457200" y="365760"/>
+            <a:ext cx="11277295" cy="914400"/>
           </a:xfrm>
           <a:prstGeom prst="rect">
             <a:avLst/>
@@ -9130,14 +9223,14 @@
           <a:noFill/>
         </p:spPr>
         <p:txBody>
-          <a:bodyPr wrap="square" lIns="45720" rIns="45720" tIns="18288" bIns="18288">
-            <a:spAutoFit/>
+          <a:bodyPr wrap="square" anchor="ctr" lIns="0" rIns="0" tIns="0" bIns="0">
+            <a:noAutofit/>
           </a:bodyPr>
           <a:lstStyle/>
           <a:p>
             <a:pPr algn="l"/>
             <a:r>
-              <a:rPr sz="3000" b="1">
+              <a:rPr sz="2800" b="1" i="0">
                 <a:solidFill>
                   <a:srgbClr val="1F4E78"/>
                 </a:solidFill>
@@ -9155,8 +9248,8 @@
         </p:nvSpPr>
         <p:spPr>
           <a:xfrm>
-            <a:off x="457200" y="1234440"/>
-            <a:ext cx="1828800" cy="36576"/>
+            <a:off x="457200" y="1298448"/>
+            <a:ext cx="2194560" cy="36576"/>
           </a:xfrm>
           <a:prstGeom prst="rect">
             <a:avLst/>
@@ -9198,8 +9291,8 @@
         </p:nvSpPr>
         <p:spPr>
           <a:xfrm>
-            <a:off x="822960" y="1463040"/>
-            <a:ext cx="10545775" cy="4892040"/>
+            <a:off x="822960" y="2148840"/>
+            <a:ext cx="10545775" cy="4114800"/>
           </a:xfrm>
           <a:prstGeom prst="rect">
             <a:avLst/>
@@ -9207,15 +9300,18 @@
           <a:noFill/>
         </p:spPr>
         <p:txBody>
-          <a:bodyPr wrap="square" lIns="45720" rIns="45720">
-            <a:spAutoFit/>
+          <a:bodyPr wrap="square" anchor="t" lIns="0" rIns="0" tIns="0" bIns="0">
+            <a:noAutofit/>
           </a:bodyPr>
           <a:lstStyle/>
           <a:p>
             <a:pPr algn="l">
               <a:lnSpc>
-                <a:spcPct val="130000"/>
+                <a:spcPct val="135000"/>
               </a:lnSpc>
+              <a:spcAft>
+                <a:spcPts val="600"/>
+              </a:spcAft>
             </a:pPr>
             <a:r>
               <a:rPr sz="2200">
@@ -9306,14 +9402,14 @@
           <a:noFill/>
         </p:spPr>
         <p:txBody>
-          <a:bodyPr wrap="square" lIns="45720" rIns="45720" tIns="18288" bIns="18288">
-            <a:spAutoFit/>
+          <a:bodyPr wrap="square" anchor="ctr" lIns="0" rIns="0" tIns="0" bIns="0">
+            <a:noAutofit/>
           </a:bodyPr>
           <a:lstStyle/>
           <a:p>
             <a:pPr algn="ctr"/>
             <a:r>
-              <a:rPr sz="5800" b="1">
+              <a:rPr sz="5800" b="1" i="0">
                 <a:solidFill>
                   <a:srgbClr val="FFFFFF"/>
                 </a:solidFill>
@@ -9349,8 +9445,8 @@
         </p:nvSpPr>
         <p:spPr>
           <a:xfrm>
-            <a:off x="457200" y="457200"/>
-            <a:ext cx="11277295" cy="822960"/>
+            <a:off x="457200" y="365760"/>
+            <a:ext cx="11277295" cy="914400"/>
           </a:xfrm>
           <a:prstGeom prst="rect">
             <a:avLst/>
@@ -9358,14 +9454,14 @@
           <a:noFill/>
         </p:spPr>
         <p:txBody>
-          <a:bodyPr wrap="square" lIns="45720" rIns="45720" tIns="18288" bIns="18288">
-            <a:spAutoFit/>
+          <a:bodyPr wrap="square" anchor="ctr" lIns="0" rIns="0" tIns="0" bIns="0">
+            <a:noAutofit/>
           </a:bodyPr>
           <a:lstStyle/>
           <a:p>
             <a:pPr algn="l"/>
             <a:r>
-              <a:rPr sz="3000" b="1">
+              <a:rPr sz="2800" b="1" i="0">
                 <a:solidFill>
                   <a:srgbClr val="1F4E78"/>
                 </a:solidFill>
@@ -9383,8 +9479,8 @@
         </p:nvSpPr>
         <p:spPr>
           <a:xfrm>
-            <a:off x="457200" y="1234440"/>
-            <a:ext cx="1828800" cy="36576"/>
+            <a:off x="457200" y="1298448"/>
+            <a:ext cx="2194560" cy="36576"/>
           </a:xfrm>
           <a:prstGeom prst="rect">
             <a:avLst/>
@@ -9426,8 +9522,8 @@
         </p:nvSpPr>
         <p:spPr>
           <a:xfrm>
-            <a:off x="457200" y="1463040"/>
-            <a:ext cx="11277295" cy="640080"/>
+            <a:off x="457200" y="1508760"/>
+            <a:ext cx="11277295" cy="502920"/>
           </a:xfrm>
           <a:prstGeom prst="rect">
             <a:avLst/>
@@ -9435,14 +9531,14 @@
           <a:noFill/>
         </p:spPr>
         <p:txBody>
-          <a:bodyPr wrap="square" lIns="45720" rIns="45720" tIns="18288" bIns="18288">
-            <a:spAutoFit/>
+          <a:bodyPr wrap="square" anchor="ctr" lIns="0" rIns="0" tIns="0" bIns="0">
+            <a:noAutofit/>
           </a:bodyPr>
           <a:lstStyle/>
           <a:p>
             <a:pPr algn="l"/>
             <a:r>
-              <a:rPr sz="2200" b="1">
+              <a:rPr sz="2000" b="1" i="0">
                 <a:solidFill>
                   <a:srgbClr val="C0392B"/>
                 </a:solidFill>
@@ -9461,7 +9557,7 @@
           <p:nvPr/>
         </p:nvGraphicFramePr>
         <p:xfrm>
-          <a:off x="457200" y="2286000"/>
+          <a:off x="457200" y="2148840"/>
           <a:ext cx="11277295" cy="2286000"/>
         </p:xfrm>
         <a:graphic>
@@ -9845,8 +9941,8 @@
         </p:nvSpPr>
         <p:spPr>
           <a:xfrm>
-            <a:off x="457200" y="457200"/>
-            <a:ext cx="11277295" cy="822960"/>
+            <a:off x="457200" y="365760"/>
+            <a:ext cx="11277295" cy="914400"/>
           </a:xfrm>
           <a:prstGeom prst="rect">
             <a:avLst/>
@@ -9854,14 +9950,14 @@
           <a:noFill/>
         </p:spPr>
         <p:txBody>
-          <a:bodyPr wrap="square" lIns="45720" rIns="45720" tIns="18288" bIns="18288">
-            <a:spAutoFit/>
+          <a:bodyPr wrap="square" anchor="ctr" lIns="0" rIns="0" tIns="0" bIns="0">
+            <a:noAutofit/>
           </a:bodyPr>
           <a:lstStyle/>
           <a:p>
             <a:pPr algn="l"/>
             <a:r>
-              <a:rPr sz="3000" b="1">
+              <a:rPr sz="2800" b="1" i="0">
                 <a:solidFill>
                   <a:srgbClr val="1F4E78"/>
                 </a:solidFill>
@@ -9879,8 +9975,8 @@
         </p:nvSpPr>
         <p:spPr>
           <a:xfrm>
-            <a:off x="457200" y="1234440"/>
-            <a:ext cx="1828800" cy="36576"/>
+            <a:off x="457200" y="1298448"/>
+            <a:ext cx="2194560" cy="36576"/>
           </a:xfrm>
           <a:prstGeom prst="rect">
             <a:avLst/>
@@ -9922,8 +10018,8 @@
         </p:nvSpPr>
         <p:spPr>
           <a:xfrm>
-            <a:off x="457200" y="1463040"/>
-            <a:ext cx="11277295" cy="640080"/>
+            <a:off x="457200" y="1508760"/>
+            <a:ext cx="11277295" cy="502920"/>
           </a:xfrm>
           <a:prstGeom prst="rect">
             <a:avLst/>
@@ -9931,14 +10027,14 @@
           <a:noFill/>
         </p:spPr>
         <p:txBody>
-          <a:bodyPr wrap="square" lIns="45720" rIns="45720" tIns="18288" bIns="18288">
-            <a:spAutoFit/>
+          <a:bodyPr wrap="square" anchor="ctr" lIns="0" rIns="0" tIns="0" bIns="0">
+            <a:noAutofit/>
           </a:bodyPr>
           <a:lstStyle/>
           <a:p>
             <a:pPr algn="l"/>
             <a:r>
-              <a:rPr sz="2200" b="1">
+              <a:rPr sz="2000" b="1" i="0">
                 <a:solidFill>
                   <a:srgbClr val="C0392B"/>
                 </a:solidFill>
@@ -9956,8 +10052,8 @@
         </p:nvSpPr>
         <p:spPr>
           <a:xfrm>
-            <a:off x="640080" y="2286000"/>
-            <a:ext cx="10911535" cy="4069080"/>
+            <a:off x="640080" y="2148840"/>
+            <a:ext cx="10911535" cy="4114800"/>
           </a:xfrm>
           <a:prstGeom prst="rect">
             <a:avLst/>
@@ -9965,15 +10061,18 @@
           <a:noFill/>
         </p:spPr>
         <p:txBody>
-          <a:bodyPr wrap="square" lIns="45720" rIns="45720">
-            <a:spAutoFit/>
+          <a:bodyPr wrap="square" anchor="t" lIns="0" rIns="0" tIns="0" bIns="0">
+            <a:noAutofit/>
           </a:bodyPr>
           <a:lstStyle/>
           <a:p>
             <a:pPr algn="l">
               <a:lnSpc>
-                <a:spcPct val="130000"/>
+                <a:spcPct val="135000"/>
               </a:lnSpc>
+              <a:spcAft>
+                <a:spcPts val="600"/>
+              </a:spcAft>
             </a:pPr>
             <a:r>
               <a:rPr sz="1800">
@@ -9987,8 +10086,11 @@
           <a:p>
             <a:pPr algn="l">
               <a:lnSpc>
-                <a:spcPct val="130000"/>
+                <a:spcPct val="135000"/>
               </a:lnSpc>
+              <a:spcAft>
+                <a:spcPts val="600"/>
+              </a:spcAft>
             </a:pPr>
             <a:r>
               <a:rPr sz="1800">
@@ -10002,8 +10104,11 @@
           <a:p>
             <a:pPr algn="l">
               <a:lnSpc>
-                <a:spcPct val="130000"/>
+                <a:spcPct val="135000"/>
               </a:lnSpc>
+              <a:spcAft>
+                <a:spcPts val="600"/>
+              </a:spcAft>
             </a:pPr>
             <a:r>
               <a:rPr sz="1800">
@@ -10017,8 +10122,11 @@
           <a:p>
             <a:pPr algn="l">
               <a:lnSpc>
-                <a:spcPct val="130000"/>
+                <a:spcPct val="135000"/>
               </a:lnSpc>
+              <a:spcAft>
+                <a:spcPts val="600"/>
+              </a:spcAft>
             </a:pPr>
             <a:r>
               <a:rPr sz="1800">
@@ -10048,14 +10156,14 @@
           <a:noFill/>
         </p:spPr>
         <p:txBody>
-          <a:bodyPr wrap="square" lIns="45720" rIns="45720" tIns="18288" bIns="18288">
-            <a:spAutoFit/>
+          <a:bodyPr wrap="square" anchor="ctr" lIns="0" rIns="0" tIns="0" bIns="0">
+            <a:noAutofit/>
           </a:bodyPr>
           <a:lstStyle/>
           <a:p>
             <a:pPr algn="l"/>
             <a:r>
-              <a:rPr sz="1100" b="0">
+              <a:rPr sz="1100" b="0" i="1">
                 <a:solidFill>
                   <a:srgbClr val="808080"/>
                 </a:solidFill>
@@ -10091,8 +10199,8 @@
         </p:nvSpPr>
         <p:spPr>
           <a:xfrm>
-            <a:off x="457200" y="457200"/>
-            <a:ext cx="11277295" cy="822960"/>
+            <a:off x="457200" y="365760"/>
+            <a:ext cx="11277295" cy="914400"/>
           </a:xfrm>
           <a:prstGeom prst="rect">
             <a:avLst/>
@@ -10100,14 +10208,14 @@
           <a:noFill/>
         </p:spPr>
         <p:txBody>
-          <a:bodyPr wrap="square" lIns="45720" rIns="45720" tIns="18288" bIns="18288">
-            <a:spAutoFit/>
+          <a:bodyPr wrap="square" anchor="ctr" lIns="0" rIns="0" tIns="0" bIns="0">
+            <a:noAutofit/>
           </a:bodyPr>
           <a:lstStyle/>
           <a:p>
             <a:pPr algn="l"/>
             <a:r>
-              <a:rPr sz="3000" b="1">
+              <a:rPr sz="2800" b="1" i="0">
                 <a:solidFill>
                   <a:srgbClr val="1F4E78"/>
                 </a:solidFill>
@@ -10125,8 +10233,8 @@
         </p:nvSpPr>
         <p:spPr>
           <a:xfrm>
-            <a:off x="457200" y="1234440"/>
-            <a:ext cx="1828800" cy="36576"/>
+            <a:off x="457200" y="1298448"/>
+            <a:ext cx="2194560" cy="36576"/>
           </a:xfrm>
           <a:prstGeom prst="rect">
             <a:avLst/>
@@ -10168,8 +10276,8 @@
         </p:nvSpPr>
         <p:spPr>
           <a:xfrm>
-            <a:off x="457200" y="1463040"/>
-            <a:ext cx="11277295" cy="640080"/>
+            <a:off x="457200" y="1508760"/>
+            <a:ext cx="11277295" cy="502920"/>
           </a:xfrm>
           <a:prstGeom prst="rect">
             <a:avLst/>
@@ -10177,14 +10285,14 @@
           <a:noFill/>
         </p:spPr>
         <p:txBody>
-          <a:bodyPr wrap="square" lIns="45720" rIns="45720" tIns="18288" bIns="18288">
-            <a:spAutoFit/>
+          <a:bodyPr wrap="square" anchor="ctr" lIns="0" rIns="0" tIns="0" bIns="0">
+            <a:noAutofit/>
           </a:bodyPr>
           <a:lstStyle/>
           <a:p>
             <a:pPr algn="l"/>
             <a:r>
-              <a:rPr sz="2200" b="1">
+              <a:rPr sz="2000" b="1" i="0">
                 <a:solidFill>
                   <a:srgbClr val="C0392B"/>
                 </a:solidFill>
@@ -10203,7 +10311,7 @@
           <p:nvPr/>
         </p:nvGraphicFramePr>
         <p:xfrm>
-          <a:off x="457200" y="2286000"/>
+          <a:off x="457200" y="2148840"/>
           <a:ext cx="11277295" cy="1828800"/>
         </p:xfrm>
         <a:graphic>
@@ -10430,8 +10538,8 @@
         </p:nvSpPr>
         <p:spPr>
           <a:xfrm>
-            <a:off x="457200" y="457200"/>
-            <a:ext cx="11277295" cy="822960"/>
+            <a:off x="457200" y="365760"/>
+            <a:ext cx="11277295" cy="914400"/>
           </a:xfrm>
           <a:prstGeom prst="rect">
             <a:avLst/>
@@ -10439,14 +10547,14 @@
           <a:noFill/>
         </p:spPr>
         <p:txBody>
-          <a:bodyPr wrap="square" lIns="45720" rIns="45720" tIns="18288" bIns="18288">
-            <a:spAutoFit/>
+          <a:bodyPr wrap="square" anchor="ctr" lIns="0" rIns="0" tIns="0" bIns="0">
+            <a:noAutofit/>
           </a:bodyPr>
           <a:lstStyle/>
           <a:p>
             <a:pPr algn="l"/>
             <a:r>
-              <a:rPr sz="3000" b="1">
+              <a:rPr sz="2800" b="1" i="0">
                 <a:solidFill>
                   <a:srgbClr val="1F4E78"/>
                 </a:solidFill>
@@ -10464,8 +10572,8 @@
         </p:nvSpPr>
         <p:spPr>
           <a:xfrm>
-            <a:off x="457200" y="1234440"/>
-            <a:ext cx="1828800" cy="36576"/>
+            <a:off x="457200" y="1298448"/>
+            <a:ext cx="2194560" cy="36576"/>
           </a:xfrm>
           <a:prstGeom prst="rect">
             <a:avLst/>
@@ -10507,8 +10615,8 @@
         </p:nvSpPr>
         <p:spPr>
           <a:xfrm>
-            <a:off x="822960" y="1463040"/>
-            <a:ext cx="10545775" cy="4892040"/>
+            <a:off x="822960" y="2148840"/>
+            <a:ext cx="10545775" cy="4114800"/>
           </a:xfrm>
           <a:prstGeom prst="rect">
             <a:avLst/>
@@ -10516,15 +10624,18 @@
           <a:noFill/>
         </p:spPr>
         <p:txBody>
-          <a:bodyPr wrap="square" lIns="45720" rIns="45720">
-            <a:spAutoFit/>
+          <a:bodyPr wrap="square" anchor="t" lIns="0" rIns="0" tIns="0" bIns="0">
+            <a:noAutofit/>
           </a:bodyPr>
           <a:lstStyle/>
           <a:p>
             <a:pPr algn="l">
               <a:lnSpc>
-                <a:spcPct val="130000"/>
+                <a:spcPct val="135000"/>
               </a:lnSpc>
+              <a:spcAft>
+                <a:spcPts val="600"/>
+              </a:spcAft>
             </a:pPr>
             <a:r>
               <a:rPr sz="2200">
@@ -10615,14 +10726,14 @@
           <a:noFill/>
         </p:spPr>
         <p:txBody>
-          <a:bodyPr wrap="square" lIns="45720" rIns="45720" tIns="18288" bIns="18288">
-            <a:spAutoFit/>
+          <a:bodyPr wrap="square" anchor="ctr" lIns="0" rIns="0" tIns="0" bIns="0">
+            <a:noAutofit/>
           </a:bodyPr>
           <a:lstStyle/>
           <a:p>
             <a:pPr algn="ctr"/>
             <a:r>
-              <a:rPr sz="5800" b="1">
+              <a:rPr sz="5800" b="1" i="0">
                 <a:solidFill>
                   <a:srgbClr val="FFFFFF"/>
                 </a:solidFill>
@@ -10658,8 +10769,8 @@
         </p:nvSpPr>
         <p:spPr>
           <a:xfrm>
-            <a:off x="457200" y="457200"/>
-            <a:ext cx="11277295" cy="822960"/>
+            <a:off x="457200" y="365760"/>
+            <a:ext cx="11277295" cy="914400"/>
           </a:xfrm>
           <a:prstGeom prst="rect">
             <a:avLst/>
@@ -10667,14 +10778,14 @@
           <a:noFill/>
         </p:spPr>
         <p:txBody>
-          <a:bodyPr wrap="square" lIns="45720" rIns="45720" tIns="18288" bIns="18288">
-            <a:spAutoFit/>
+          <a:bodyPr wrap="square" anchor="ctr" lIns="0" rIns="0" tIns="0" bIns="0">
+            <a:noAutofit/>
           </a:bodyPr>
           <a:lstStyle/>
           <a:p>
             <a:pPr algn="l"/>
             <a:r>
-              <a:rPr sz="3000" b="1">
+              <a:rPr sz="2800" b="1" i="0">
                 <a:solidFill>
                   <a:srgbClr val="1F4E78"/>
                 </a:solidFill>
@@ -10692,8 +10803,8 @@
         </p:nvSpPr>
         <p:spPr>
           <a:xfrm>
-            <a:off x="457200" y="1234440"/>
-            <a:ext cx="1828800" cy="36576"/>
+            <a:off x="457200" y="1298448"/>
+            <a:ext cx="2194560" cy="36576"/>
           </a:xfrm>
           <a:prstGeom prst="rect">
             <a:avLst/>
@@ -10735,8 +10846,8 @@
         </p:nvSpPr>
         <p:spPr>
           <a:xfrm>
-            <a:off x="457200" y="1463040"/>
-            <a:ext cx="11277295" cy="640080"/>
+            <a:off x="457200" y="1508760"/>
+            <a:ext cx="11277295" cy="502920"/>
           </a:xfrm>
           <a:prstGeom prst="rect">
             <a:avLst/>
@@ -10744,14 +10855,14 @@
           <a:noFill/>
         </p:spPr>
         <p:txBody>
-          <a:bodyPr wrap="square" lIns="45720" rIns="45720" tIns="18288" bIns="18288">
-            <a:spAutoFit/>
+          <a:bodyPr wrap="square" anchor="ctr" lIns="0" rIns="0" tIns="0" bIns="0">
+            <a:noAutofit/>
           </a:bodyPr>
           <a:lstStyle/>
           <a:p>
             <a:pPr algn="l"/>
             <a:r>
-              <a:rPr sz="2200" b="1">
+              <a:rPr sz="2000" b="1" i="0">
                 <a:solidFill>
                   <a:srgbClr val="C0392B"/>
                 </a:solidFill>
@@ -10769,8 +10880,8 @@
         </p:nvSpPr>
         <p:spPr>
           <a:xfrm>
-            <a:off x="640080" y="2286000"/>
-            <a:ext cx="10911535" cy="4069080"/>
+            <a:off x="640080" y="2148840"/>
+            <a:ext cx="10911535" cy="4114800"/>
           </a:xfrm>
           <a:prstGeom prst="rect">
             <a:avLst/>
@@ -10778,15 +10889,18 @@
           <a:noFill/>
         </p:spPr>
         <p:txBody>
-          <a:bodyPr wrap="square" lIns="45720" rIns="45720">
-            <a:spAutoFit/>
+          <a:bodyPr wrap="square" anchor="t" lIns="0" rIns="0" tIns="0" bIns="0">
+            <a:noAutofit/>
           </a:bodyPr>
           <a:lstStyle/>
           <a:p>
             <a:pPr algn="l">
               <a:lnSpc>
-                <a:spcPct val="130000"/>
+                <a:spcPct val="135000"/>
               </a:lnSpc>
+              <a:spcAft>
+                <a:spcPts val="600"/>
+              </a:spcAft>
             </a:pPr>
             <a:r>
               <a:rPr sz="1800">
@@ -10800,8 +10914,11 @@
           <a:p>
             <a:pPr algn="l">
               <a:lnSpc>
-                <a:spcPct val="130000"/>
+                <a:spcPct val="135000"/>
               </a:lnSpc>
+              <a:spcAft>
+                <a:spcPts val="600"/>
+              </a:spcAft>
             </a:pPr>
             <a:r>
               <a:rPr sz="1800">
@@ -10815,8 +10932,11 @@
           <a:p>
             <a:pPr algn="l">
               <a:lnSpc>
-                <a:spcPct val="130000"/>
+                <a:spcPct val="135000"/>
               </a:lnSpc>
+              <a:spcAft>
+                <a:spcPts val="600"/>
+              </a:spcAft>
             </a:pPr>
             <a:r>
               <a:rPr sz="1800">
@@ -10830,8 +10950,11 @@
           <a:p>
             <a:pPr algn="l">
               <a:lnSpc>
-                <a:spcPct val="130000"/>
+                <a:spcPct val="135000"/>
               </a:lnSpc>
+              <a:spcAft>
+                <a:spcPts val="600"/>
+              </a:spcAft>
             </a:pPr>
             <a:r>
               <a:rPr sz="1800">
@@ -10861,14 +10984,14 @@
           <a:noFill/>
         </p:spPr>
         <p:txBody>
-          <a:bodyPr wrap="square" lIns="45720" rIns="45720" tIns="18288" bIns="18288">
-            <a:spAutoFit/>
+          <a:bodyPr wrap="square" anchor="ctr" lIns="0" rIns="0" tIns="0" bIns="0">
+            <a:noAutofit/>
           </a:bodyPr>
           <a:lstStyle/>
           <a:p>
             <a:pPr algn="l"/>
             <a:r>
-              <a:rPr sz="1100" b="0">
+              <a:rPr sz="1100" b="0" i="1">
                 <a:solidFill>
                   <a:srgbClr val="808080"/>
                 </a:solidFill>
@@ -10904,8 +11027,8 @@
         </p:nvSpPr>
         <p:spPr>
           <a:xfrm>
-            <a:off x="457200" y="457200"/>
-            <a:ext cx="11277295" cy="822960"/>
+            <a:off x="457200" y="365760"/>
+            <a:ext cx="11277295" cy="914400"/>
           </a:xfrm>
           <a:prstGeom prst="rect">
             <a:avLst/>
@@ -10913,14 +11036,14 @@
           <a:noFill/>
         </p:spPr>
         <p:txBody>
-          <a:bodyPr wrap="square" lIns="45720" rIns="45720" tIns="18288" bIns="18288">
-            <a:spAutoFit/>
+          <a:bodyPr wrap="square" anchor="ctr" lIns="0" rIns="0" tIns="0" bIns="0">
+            <a:noAutofit/>
           </a:bodyPr>
           <a:lstStyle/>
           <a:p>
             <a:pPr algn="l"/>
             <a:r>
-              <a:rPr sz="3000" b="1">
+              <a:rPr sz="2800" b="1" i="0">
                 <a:solidFill>
                   <a:srgbClr val="1F4E78"/>
                 </a:solidFill>
@@ -10938,8 +11061,8 @@
         </p:nvSpPr>
         <p:spPr>
           <a:xfrm>
-            <a:off x="457200" y="1234440"/>
-            <a:ext cx="1828800" cy="36576"/>
+            <a:off x="457200" y="1298448"/>
+            <a:ext cx="2194560" cy="36576"/>
           </a:xfrm>
           <a:prstGeom prst="rect">
             <a:avLst/>
@@ -10981,8 +11104,8 @@
         </p:nvSpPr>
         <p:spPr>
           <a:xfrm>
-            <a:off x="457200" y="1463040"/>
-            <a:ext cx="11277295" cy="640080"/>
+            <a:off x="457200" y="1508760"/>
+            <a:ext cx="11277295" cy="502920"/>
           </a:xfrm>
           <a:prstGeom prst="rect">
             <a:avLst/>
@@ -10990,14 +11113,14 @@
           <a:noFill/>
         </p:spPr>
         <p:txBody>
-          <a:bodyPr wrap="square" lIns="45720" rIns="45720" tIns="18288" bIns="18288">
-            <a:spAutoFit/>
+          <a:bodyPr wrap="square" anchor="ctr" lIns="0" rIns="0" tIns="0" bIns="0">
+            <a:noAutofit/>
           </a:bodyPr>
           <a:lstStyle/>
           <a:p>
             <a:pPr algn="l"/>
             <a:r>
-              <a:rPr sz="2200" b="1">
+              <a:rPr sz="2000" b="1" i="0">
                 <a:solidFill>
                   <a:srgbClr val="C0392B"/>
                 </a:solidFill>
@@ -11015,8 +11138,8 @@
         </p:nvSpPr>
         <p:spPr>
           <a:xfrm>
-            <a:off x="731520" y="2286000"/>
-            <a:ext cx="10728655" cy="3977640"/>
+            <a:off x="731520" y="2148840"/>
+            <a:ext cx="10728655" cy="4114800"/>
           </a:xfrm>
           <a:prstGeom prst="rect">
             <a:avLst/>
@@ -11024,8 +11147,8 @@
           <a:noFill/>
         </p:spPr>
         <p:txBody>
-          <a:bodyPr wrap="none" tIns="91440">
-            <a:spAutoFit/>
+          <a:bodyPr wrap="none" anchor="t" tIns="91440">
+            <a:noAutofit/>
           </a:bodyPr>
           <a:lstStyle/>
           <a:p>
@@ -11077,8 +11200,8 @@
         </p:nvSpPr>
         <p:spPr>
           <a:xfrm>
-            <a:off x="457200" y="457200"/>
-            <a:ext cx="11277295" cy="822960"/>
+            <a:off x="457200" y="365760"/>
+            <a:ext cx="11277295" cy="914400"/>
           </a:xfrm>
           <a:prstGeom prst="rect">
             <a:avLst/>
@@ -11086,14 +11209,14 @@
           <a:noFill/>
         </p:spPr>
         <p:txBody>
-          <a:bodyPr wrap="square" lIns="45720" rIns="45720" tIns="18288" bIns="18288">
-            <a:spAutoFit/>
+          <a:bodyPr wrap="square" anchor="ctr" lIns="0" rIns="0" tIns="0" bIns="0">
+            <a:noAutofit/>
           </a:bodyPr>
           <a:lstStyle/>
           <a:p>
             <a:pPr algn="l"/>
             <a:r>
-              <a:rPr sz="3000" b="1">
+              <a:rPr sz="2800" b="1" i="0">
                 <a:solidFill>
                   <a:srgbClr val="1F4E78"/>
                 </a:solidFill>
@@ -11111,8 +11234,8 @@
         </p:nvSpPr>
         <p:spPr>
           <a:xfrm>
-            <a:off x="457200" y="1234440"/>
-            <a:ext cx="1828800" cy="36576"/>
+            <a:off x="457200" y="1298448"/>
+            <a:ext cx="2194560" cy="36576"/>
           </a:xfrm>
           <a:prstGeom prst="rect">
             <a:avLst/>
@@ -11154,8 +11277,8 @@
         </p:nvSpPr>
         <p:spPr>
           <a:xfrm>
-            <a:off x="457200" y="1463040"/>
-            <a:ext cx="11277295" cy="640080"/>
+            <a:off x="457200" y="1508760"/>
+            <a:ext cx="11277295" cy="502920"/>
           </a:xfrm>
           <a:prstGeom prst="rect">
             <a:avLst/>
@@ -11163,14 +11286,14 @@
           <a:noFill/>
         </p:spPr>
         <p:txBody>
-          <a:bodyPr wrap="square" lIns="45720" rIns="45720" tIns="18288" bIns="18288">
-            <a:spAutoFit/>
+          <a:bodyPr wrap="square" anchor="ctr" lIns="0" rIns="0" tIns="0" bIns="0">
+            <a:noAutofit/>
           </a:bodyPr>
           <a:lstStyle/>
           <a:p>
             <a:pPr algn="l"/>
             <a:r>
-              <a:rPr sz="2200" b="1">
+              <a:rPr sz="2000" b="1" i="0">
                 <a:solidFill>
                   <a:srgbClr val="C0392B"/>
                 </a:solidFill>
@@ -11189,7 +11312,7 @@
           <p:nvPr/>
         </p:nvGraphicFramePr>
         <p:xfrm>
-          <a:off x="457200" y="2286000"/>
+          <a:off x="457200" y="2148840"/>
           <a:ext cx="11277295" cy="1828800"/>
         </p:xfrm>
         <a:graphic>
@@ -11416,8 +11539,8 @@
         </p:nvSpPr>
         <p:spPr>
           <a:xfrm>
-            <a:off x="457200" y="457200"/>
-            <a:ext cx="11277295" cy="822960"/>
+            <a:off x="457200" y="365760"/>
+            <a:ext cx="11277295" cy="914400"/>
           </a:xfrm>
           <a:prstGeom prst="rect">
             <a:avLst/>
@@ -11425,14 +11548,14 @@
           <a:noFill/>
         </p:spPr>
         <p:txBody>
-          <a:bodyPr wrap="square" lIns="45720" rIns="45720" tIns="18288" bIns="18288">
-            <a:spAutoFit/>
+          <a:bodyPr wrap="square" anchor="ctr" lIns="0" rIns="0" tIns="0" bIns="0">
+            <a:noAutofit/>
           </a:bodyPr>
           <a:lstStyle/>
           <a:p>
             <a:pPr algn="l"/>
             <a:r>
-              <a:rPr sz="3000" b="1">
+              <a:rPr sz="2800" b="1" i="0">
                 <a:solidFill>
                   <a:srgbClr val="1F4E78"/>
                 </a:solidFill>
@@ -11450,8 +11573,8 @@
         </p:nvSpPr>
         <p:spPr>
           <a:xfrm>
-            <a:off x="457200" y="1234440"/>
-            <a:ext cx="1828800" cy="36576"/>
+            <a:off x="457200" y="1298448"/>
+            <a:ext cx="2194560" cy="36576"/>
           </a:xfrm>
           <a:prstGeom prst="rect">
             <a:avLst/>
@@ -11493,8 +11616,8 @@
         </p:nvSpPr>
         <p:spPr>
           <a:xfrm>
-            <a:off x="457200" y="1463040"/>
-            <a:ext cx="11277295" cy="640080"/>
+            <a:off x="457200" y="1508760"/>
+            <a:ext cx="11277295" cy="502920"/>
           </a:xfrm>
           <a:prstGeom prst="rect">
             <a:avLst/>
@@ -11502,14 +11625,14 @@
           <a:noFill/>
         </p:spPr>
         <p:txBody>
-          <a:bodyPr wrap="square" lIns="45720" rIns="45720" tIns="18288" bIns="18288">
-            <a:spAutoFit/>
+          <a:bodyPr wrap="square" anchor="ctr" lIns="0" rIns="0" tIns="0" bIns="0">
+            <a:noAutofit/>
           </a:bodyPr>
           <a:lstStyle/>
           <a:p>
             <a:pPr algn="l"/>
             <a:r>
-              <a:rPr sz="2200" b="1">
+              <a:rPr sz="2000" b="1" i="0">
                 <a:solidFill>
                   <a:srgbClr val="C0392B"/>
                 </a:solidFill>
@@ -11528,7 +11651,7 @@
           <p:nvPr/>
         </p:nvGraphicFramePr>
         <p:xfrm>
-          <a:off x="457200" y="2286000"/>
+          <a:off x="457200" y="2148840"/>
           <a:ext cx="11277295" cy="1828800"/>
         </p:xfrm>
         <a:graphic>
@@ -11844,8 +11967,8 @@
         </p:nvSpPr>
         <p:spPr>
           <a:xfrm>
-            <a:off x="457200" y="457200"/>
-            <a:ext cx="11277295" cy="822960"/>
+            <a:off x="457200" y="365760"/>
+            <a:ext cx="11277295" cy="914400"/>
           </a:xfrm>
           <a:prstGeom prst="rect">
             <a:avLst/>
@@ -11853,14 +11976,14 @@
           <a:noFill/>
         </p:spPr>
         <p:txBody>
-          <a:bodyPr wrap="square" lIns="45720" rIns="45720" tIns="18288" bIns="18288">
-            <a:spAutoFit/>
+          <a:bodyPr wrap="square" anchor="ctr" lIns="0" rIns="0" tIns="0" bIns="0">
+            <a:noAutofit/>
           </a:bodyPr>
           <a:lstStyle/>
           <a:p>
             <a:pPr algn="l"/>
             <a:r>
-              <a:rPr sz="3000" b="1">
+              <a:rPr sz="2800" b="1" i="0">
                 <a:solidFill>
                   <a:srgbClr val="1F4E78"/>
                 </a:solidFill>
@@ -11878,8 +12001,8 @@
         </p:nvSpPr>
         <p:spPr>
           <a:xfrm>
-            <a:off x="457200" y="1234440"/>
-            <a:ext cx="1828800" cy="36576"/>
+            <a:off x="457200" y="1298448"/>
+            <a:ext cx="2194560" cy="36576"/>
           </a:xfrm>
           <a:prstGeom prst="rect">
             <a:avLst/>
@@ -11921,8 +12044,8 @@
         </p:nvSpPr>
         <p:spPr>
           <a:xfrm>
-            <a:off x="457200" y="1463040"/>
-            <a:ext cx="11277295" cy="640080"/>
+            <a:off x="457200" y="1508760"/>
+            <a:ext cx="11277295" cy="502920"/>
           </a:xfrm>
           <a:prstGeom prst="rect">
             <a:avLst/>
@@ -11930,14 +12053,14 @@
           <a:noFill/>
         </p:spPr>
         <p:txBody>
-          <a:bodyPr wrap="square" lIns="45720" rIns="45720" tIns="18288" bIns="18288">
-            <a:spAutoFit/>
+          <a:bodyPr wrap="square" anchor="ctr" lIns="0" rIns="0" tIns="0" bIns="0">
+            <a:noAutofit/>
           </a:bodyPr>
           <a:lstStyle/>
           <a:p>
             <a:pPr algn="l"/>
             <a:r>
-              <a:rPr sz="2200" b="1">
+              <a:rPr sz="2000" b="1" i="0">
                 <a:solidFill>
                   <a:srgbClr val="C0392B"/>
                 </a:solidFill>
@@ -11955,8 +12078,8 @@
         </p:nvSpPr>
         <p:spPr>
           <a:xfrm>
-            <a:off x="640080" y="2286000"/>
-            <a:ext cx="10911535" cy="4069080"/>
+            <a:off x="640080" y="2148840"/>
+            <a:ext cx="10911535" cy="4114800"/>
           </a:xfrm>
           <a:prstGeom prst="rect">
             <a:avLst/>
@@ -11964,15 +12087,18 @@
           <a:noFill/>
         </p:spPr>
         <p:txBody>
-          <a:bodyPr wrap="square" lIns="45720" rIns="45720">
-            <a:spAutoFit/>
+          <a:bodyPr wrap="square" anchor="t" lIns="0" rIns="0" tIns="0" bIns="0">
+            <a:noAutofit/>
           </a:bodyPr>
           <a:lstStyle/>
           <a:p>
             <a:pPr algn="l">
               <a:lnSpc>
-                <a:spcPct val="130000"/>
+                <a:spcPct val="135000"/>
               </a:lnSpc>
+              <a:spcAft>
+                <a:spcPts val="600"/>
+              </a:spcAft>
             </a:pPr>
             <a:r>
               <a:rPr sz="1800">
@@ -11986,8 +12112,11 @@
           <a:p>
             <a:pPr algn="l">
               <a:lnSpc>
-                <a:spcPct val="130000"/>
+                <a:spcPct val="135000"/>
               </a:lnSpc>
+              <a:spcAft>
+                <a:spcPts val="600"/>
+              </a:spcAft>
             </a:pPr>
             <a:r>
               <a:rPr sz="1800">
@@ -12001,8 +12130,11 @@
           <a:p>
             <a:pPr algn="l">
               <a:lnSpc>
-                <a:spcPct val="130000"/>
+                <a:spcPct val="135000"/>
               </a:lnSpc>
+              <a:spcAft>
+                <a:spcPts val="600"/>
+              </a:spcAft>
             </a:pPr>
             <a:r>
               <a:rPr sz="1800">
@@ -12016,8 +12148,11 @@
           <a:p>
             <a:pPr algn="l">
               <a:lnSpc>
-                <a:spcPct val="130000"/>
+                <a:spcPct val="135000"/>
               </a:lnSpc>
+              <a:spcAft>
+                <a:spcPts val="600"/>
+              </a:spcAft>
             </a:pPr>
             <a:r>
               <a:rPr sz="1800">
@@ -12056,8 +12191,8 @@
         </p:nvSpPr>
         <p:spPr>
           <a:xfrm>
-            <a:off x="457200" y="457200"/>
-            <a:ext cx="11277295" cy="822960"/>
+            <a:off x="457200" y="365760"/>
+            <a:ext cx="11277295" cy="914400"/>
           </a:xfrm>
           <a:prstGeom prst="rect">
             <a:avLst/>
@@ -12065,14 +12200,14 @@
           <a:noFill/>
         </p:spPr>
         <p:txBody>
-          <a:bodyPr wrap="square" lIns="45720" rIns="45720" tIns="18288" bIns="18288">
-            <a:spAutoFit/>
+          <a:bodyPr wrap="square" anchor="ctr" lIns="0" rIns="0" tIns="0" bIns="0">
+            <a:noAutofit/>
           </a:bodyPr>
           <a:lstStyle/>
           <a:p>
             <a:pPr algn="l"/>
             <a:r>
-              <a:rPr sz="3000" b="1">
+              <a:rPr sz="2800" b="1" i="0">
                 <a:solidFill>
                   <a:srgbClr val="1F4E78"/>
                 </a:solidFill>
@@ -12090,8 +12225,8 @@
         </p:nvSpPr>
         <p:spPr>
           <a:xfrm>
-            <a:off x="457200" y="1234440"/>
-            <a:ext cx="1828800" cy="36576"/>
+            <a:off x="457200" y="1298448"/>
+            <a:ext cx="2194560" cy="36576"/>
           </a:xfrm>
           <a:prstGeom prst="rect">
             <a:avLst/>
@@ -12133,8 +12268,8 @@
         </p:nvSpPr>
         <p:spPr>
           <a:xfrm>
-            <a:off x="457200" y="1463040"/>
-            <a:ext cx="11277295" cy="640080"/>
+            <a:off x="457200" y="1508760"/>
+            <a:ext cx="11277295" cy="502920"/>
           </a:xfrm>
           <a:prstGeom prst="rect">
             <a:avLst/>
@@ -12142,14 +12277,14 @@
           <a:noFill/>
         </p:spPr>
         <p:txBody>
-          <a:bodyPr wrap="square" lIns="45720" rIns="45720" tIns="18288" bIns="18288">
-            <a:spAutoFit/>
+          <a:bodyPr wrap="square" anchor="ctr" lIns="0" rIns="0" tIns="0" bIns="0">
+            <a:noAutofit/>
           </a:bodyPr>
           <a:lstStyle/>
           <a:p>
             <a:pPr algn="l"/>
             <a:r>
-              <a:rPr sz="2200" b="1">
+              <a:rPr sz="2000" b="1" i="0">
                 <a:solidFill>
                   <a:srgbClr val="C0392B"/>
                 </a:solidFill>
@@ -12167,8 +12302,8 @@
         </p:nvSpPr>
         <p:spPr>
           <a:xfrm>
-            <a:off x="640080" y="2286000"/>
-            <a:ext cx="10911535" cy="4069080"/>
+            <a:off x="640080" y="2148840"/>
+            <a:ext cx="10911535" cy="4114800"/>
           </a:xfrm>
           <a:prstGeom prst="rect">
             <a:avLst/>
@@ -12176,15 +12311,18 @@
           <a:noFill/>
         </p:spPr>
         <p:txBody>
-          <a:bodyPr wrap="square" lIns="45720" rIns="45720">
-            <a:spAutoFit/>
+          <a:bodyPr wrap="square" anchor="t" lIns="0" rIns="0" tIns="0" bIns="0">
+            <a:noAutofit/>
           </a:bodyPr>
           <a:lstStyle/>
           <a:p>
             <a:pPr algn="l">
               <a:lnSpc>
-                <a:spcPct val="130000"/>
+                <a:spcPct val="135000"/>
               </a:lnSpc>
+              <a:spcAft>
+                <a:spcPts val="600"/>
+              </a:spcAft>
             </a:pPr>
             <a:r>
               <a:rPr sz="1800">
@@ -12198,8 +12336,11 @@
           <a:p>
             <a:pPr algn="l">
               <a:lnSpc>
-                <a:spcPct val="130000"/>
+                <a:spcPct val="135000"/>
               </a:lnSpc>
+              <a:spcAft>
+                <a:spcPts val="600"/>
+              </a:spcAft>
             </a:pPr>
             <a:r>
               <a:rPr sz="1800">
@@ -12213,8 +12354,11 @@
           <a:p>
             <a:pPr algn="l">
               <a:lnSpc>
-                <a:spcPct val="130000"/>
+                <a:spcPct val="135000"/>
               </a:lnSpc>
+              <a:spcAft>
+                <a:spcPts val="600"/>
+              </a:spcAft>
             </a:pPr>
             <a:r>
               <a:rPr sz="1800">
@@ -12253,8 +12397,8 @@
         </p:nvSpPr>
         <p:spPr>
           <a:xfrm>
-            <a:off x="457200" y="457200"/>
-            <a:ext cx="11277295" cy="822960"/>
+            <a:off x="457200" y="365760"/>
+            <a:ext cx="11277295" cy="914400"/>
           </a:xfrm>
           <a:prstGeom prst="rect">
             <a:avLst/>
@@ -12262,14 +12406,14 @@
           <a:noFill/>
         </p:spPr>
         <p:txBody>
-          <a:bodyPr wrap="square" lIns="45720" rIns="45720" tIns="18288" bIns="18288">
-            <a:spAutoFit/>
+          <a:bodyPr wrap="square" anchor="ctr" lIns="0" rIns="0" tIns="0" bIns="0">
+            <a:noAutofit/>
           </a:bodyPr>
           <a:lstStyle/>
           <a:p>
             <a:pPr algn="l"/>
             <a:r>
-              <a:rPr sz="3000" b="1">
+              <a:rPr sz="2800" b="1" i="0">
                 <a:solidFill>
                   <a:srgbClr val="1F4E78"/>
                 </a:solidFill>
@@ -12287,8 +12431,8 @@
         </p:nvSpPr>
         <p:spPr>
           <a:xfrm>
-            <a:off x="457200" y="1234440"/>
-            <a:ext cx="1828800" cy="36576"/>
+            <a:off x="457200" y="1298448"/>
+            <a:ext cx="2194560" cy="36576"/>
           </a:xfrm>
           <a:prstGeom prst="rect">
             <a:avLst/>
@@ -12330,8 +12474,8 @@
         </p:nvSpPr>
         <p:spPr>
           <a:xfrm>
-            <a:off x="457200" y="1463040"/>
-            <a:ext cx="11277295" cy="640080"/>
+            <a:off x="457200" y="1508760"/>
+            <a:ext cx="11277295" cy="502920"/>
           </a:xfrm>
           <a:prstGeom prst="rect">
             <a:avLst/>
@@ -12339,14 +12483,14 @@
           <a:noFill/>
         </p:spPr>
         <p:txBody>
-          <a:bodyPr wrap="square" lIns="45720" rIns="45720" tIns="18288" bIns="18288">
-            <a:spAutoFit/>
+          <a:bodyPr wrap="square" anchor="ctr" lIns="0" rIns="0" tIns="0" bIns="0">
+            <a:noAutofit/>
           </a:bodyPr>
           <a:lstStyle/>
           <a:p>
             <a:pPr algn="l"/>
             <a:r>
-              <a:rPr sz="2200" b="1">
+              <a:rPr sz="2000" b="1" i="0">
                 <a:solidFill>
                   <a:srgbClr val="C0392B"/>
                 </a:solidFill>
@@ -12365,7 +12509,7 @@
           <p:nvPr/>
         </p:nvGraphicFramePr>
         <p:xfrm>
-          <a:off x="457200" y="2286000"/>
+          <a:off x="457200" y="2148840"/>
           <a:ext cx="11277295" cy="2743200"/>
         </p:xfrm>
         <a:graphic>
@@ -12817,8 +12961,8 @@
         </p:nvSpPr>
         <p:spPr>
           <a:xfrm>
-            <a:off x="457200" y="457200"/>
-            <a:ext cx="11277295" cy="822960"/>
+            <a:off x="457200" y="365760"/>
+            <a:ext cx="11277295" cy="914400"/>
           </a:xfrm>
           <a:prstGeom prst="rect">
             <a:avLst/>
@@ -12826,14 +12970,14 @@
           <a:noFill/>
         </p:spPr>
         <p:txBody>
-          <a:bodyPr wrap="square" lIns="45720" rIns="45720" tIns="18288" bIns="18288">
-            <a:spAutoFit/>
+          <a:bodyPr wrap="square" anchor="ctr" lIns="0" rIns="0" tIns="0" bIns="0">
+            <a:noAutofit/>
           </a:bodyPr>
           <a:lstStyle/>
           <a:p>
             <a:pPr algn="l"/>
             <a:r>
-              <a:rPr sz="3000" b="1">
+              <a:rPr sz="2800" b="1" i="0">
                 <a:solidFill>
                   <a:srgbClr val="1F4E78"/>
                 </a:solidFill>
@@ -12851,8 +12995,8 @@
         </p:nvSpPr>
         <p:spPr>
           <a:xfrm>
-            <a:off x="457200" y="1234440"/>
-            <a:ext cx="1828800" cy="36576"/>
+            <a:off x="457200" y="1298448"/>
+            <a:ext cx="2194560" cy="36576"/>
           </a:xfrm>
           <a:prstGeom prst="rect">
             <a:avLst/>
@@ -12894,8 +13038,8 @@
         </p:nvSpPr>
         <p:spPr>
           <a:xfrm>
-            <a:off x="457200" y="1463040"/>
-            <a:ext cx="11277295" cy="640080"/>
+            <a:off x="457200" y="1508760"/>
+            <a:ext cx="11277295" cy="502920"/>
           </a:xfrm>
           <a:prstGeom prst="rect">
             <a:avLst/>
@@ -12903,14 +13047,14 @@
           <a:noFill/>
         </p:spPr>
         <p:txBody>
-          <a:bodyPr wrap="square" lIns="45720" rIns="45720" tIns="18288" bIns="18288">
-            <a:spAutoFit/>
+          <a:bodyPr wrap="square" anchor="ctr" lIns="0" rIns="0" tIns="0" bIns="0">
+            <a:noAutofit/>
           </a:bodyPr>
           <a:lstStyle/>
           <a:p>
             <a:pPr algn="l"/>
             <a:r>
-              <a:rPr sz="2200" b="1">
+              <a:rPr sz="2000" b="1" i="0">
                 <a:solidFill>
                   <a:srgbClr val="C0392B"/>
                 </a:solidFill>
@@ -12928,8 +13072,8 @@
         </p:nvSpPr>
         <p:spPr>
           <a:xfrm>
-            <a:off x="640080" y="2286000"/>
-            <a:ext cx="10911535" cy="4069080"/>
+            <a:off x="640080" y="2148840"/>
+            <a:ext cx="10911535" cy="4114800"/>
           </a:xfrm>
           <a:prstGeom prst="rect">
             <a:avLst/>
@@ -12937,15 +13081,18 @@
           <a:noFill/>
         </p:spPr>
         <p:txBody>
-          <a:bodyPr wrap="square" lIns="45720" rIns="45720">
-            <a:spAutoFit/>
+          <a:bodyPr wrap="square" anchor="t" lIns="0" rIns="0" tIns="0" bIns="0">
+            <a:noAutofit/>
           </a:bodyPr>
           <a:lstStyle/>
           <a:p>
             <a:pPr algn="l">
               <a:lnSpc>
-                <a:spcPct val="130000"/>
+                <a:spcPct val="135000"/>
               </a:lnSpc>
+              <a:spcAft>
+                <a:spcPts val="600"/>
+              </a:spcAft>
             </a:pPr>
             <a:r>
               <a:rPr sz="1800">
@@ -12959,8 +13106,11 @@
           <a:p>
             <a:pPr algn="l">
               <a:lnSpc>
-                <a:spcPct val="130000"/>
+                <a:spcPct val="135000"/>
               </a:lnSpc>
+              <a:spcAft>
+                <a:spcPts val="600"/>
+              </a:spcAft>
             </a:pPr>
             <a:r>
               <a:rPr sz="1800">
@@ -12974,8 +13124,11 @@
           <a:p>
             <a:pPr algn="l">
               <a:lnSpc>
-                <a:spcPct val="130000"/>
+                <a:spcPct val="135000"/>
               </a:lnSpc>
+              <a:spcAft>
+                <a:spcPts val="600"/>
+              </a:spcAft>
             </a:pPr>
             <a:r>
               <a:rPr sz="1800">
@@ -12989,8 +13142,11 @@
           <a:p>
             <a:pPr algn="l">
               <a:lnSpc>
-                <a:spcPct val="130000"/>
+                <a:spcPct val="135000"/>
               </a:lnSpc>
+              <a:spcAft>
+                <a:spcPts val="600"/>
+              </a:spcAft>
             </a:pPr>
             <a:r>
               <a:rPr sz="1800">
@@ -13029,8 +13185,8 @@
         </p:nvSpPr>
         <p:spPr>
           <a:xfrm>
-            <a:off x="457200" y="457200"/>
-            <a:ext cx="11277295" cy="822960"/>
+            <a:off x="457200" y="365760"/>
+            <a:ext cx="11277295" cy="914400"/>
           </a:xfrm>
           <a:prstGeom prst="rect">
             <a:avLst/>
@@ -13038,14 +13194,14 @@
           <a:noFill/>
         </p:spPr>
         <p:txBody>
-          <a:bodyPr wrap="square" lIns="45720" rIns="45720" tIns="18288" bIns="18288">
-            <a:spAutoFit/>
+          <a:bodyPr wrap="square" anchor="ctr" lIns="0" rIns="0" tIns="0" bIns="0">
+            <a:noAutofit/>
           </a:bodyPr>
           <a:lstStyle/>
           <a:p>
             <a:pPr algn="l"/>
             <a:r>
-              <a:rPr sz="3000" b="1">
+              <a:rPr sz="2800" b="1" i="0">
                 <a:solidFill>
                   <a:srgbClr val="1F4E78"/>
                 </a:solidFill>
@@ -13063,8 +13219,8 @@
         </p:nvSpPr>
         <p:spPr>
           <a:xfrm>
-            <a:off x="457200" y="1234440"/>
-            <a:ext cx="1828800" cy="36576"/>
+            <a:off x="457200" y="1298448"/>
+            <a:ext cx="2194560" cy="36576"/>
           </a:xfrm>
           <a:prstGeom prst="rect">
             <a:avLst/>
@@ -13106,8 +13262,8 @@
         </p:nvSpPr>
         <p:spPr>
           <a:xfrm>
-            <a:off x="457200" y="1463040"/>
-            <a:ext cx="11277295" cy="640080"/>
+            <a:off x="457200" y="1508760"/>
+            <a:ext cx="11277295" cy="502920"/>
           </a:xfrm>
           <a:prstGeom prst="rect">
             <a:avLst/>
@@ -13115,14 +13271,14 @@
           <a:noFill/>
         </p:spPr>
         <p:txBody>
-          <a:bodyPr wrap="square" lIns="45720" rIns="45720" tIns="18288" bIns="18288">
-            <a:spAutoFit/>
+          <a:bodyPr wrap="square" anchor="ctr" lIns="0" rIns="0" tIns="0" bIns="0">
+            <a:noAutofit/>
           </a:bodyPr>
           <a:lstStyle/>
           <a:p>
             <a:pPr algn="l"/>
             <a:r>
-              <a:rPr sz="2200" b="1">
+              <a:rPr sz="2000" b="1" i="0">
                 <a:solidFill>
                   <a:srgbClr val="C0392B"/>
                 </a:solidFill>
@@ -13140,8 +13296,8 @@
         </p:nvSpPr>
         <p:spPr>
           <a:xfrm>
-            <a:off x="640080" y="2286000"/>
-            <a:ext cx="10911535" cy="4069080"/>
+            <a:off x="640080" y="2148840"/>
+            <a:ext cx="10911535" cy="4114800"/>
           </a:xfrm>
           <a:prstGeom prst="rect">
             <a:avLst/>
@@ -13149,15 +13305,18 @@
           <a:noFill/>
         </p:spPr>
         <p:txBody>
-          <a:bodyPr wrap="square" lIns="45720" rIns="45720">
-            <a:spAutoFit/>
+          <a:bodyPr wrap="square" anchor="t" lIns="0" rIns="0" tIns="0" bIns="0">
+            <a:noAutofit/>
           </a:bodyPr>
           <a:lstStyle/>
           <a:p>
             <a:pPr algn="l">
               <a:lnSpc>
-                <a:spcPct val="130000"/>
+                <a:spcPct val="135000"/>
               </a:lnSpc>
+              <a:spcAft>
+                <a:spcPts val="600"/>
+              </a:spcAft>
             </a:pPr>
             <a:r>
               <a:rPr sz="1800">
@@ -13171,8 +13330,11 @@
           <a:p>
             <a:pPr algn="l">
               <a:lnSpc>
-                <a:spcPct val="130000"/>
+                <a:spcPct val="135000"/>
               </a:lnSpc>
+              <a:spcAft>
+                <a:spcPts val="600"/>
+              </a:spcAft>
             </a:pPr>
             <a:r>
               <a:rPr sz="1800">
@@ -13186,8 +13348,11 @@
           <a:p>
             <a:pPr algn="l">
               <a:lnSpc>
-                <a:spcPct val="130000"/>
+                <a:spcPct val="135000"/>
               </a:lnSpc>
+              <a:spcAft>
+                <a:spcPts val="600"/>
+              </a:spcAft>
             </a:pPr>
             <a:r>
               <a:rPr sz="1800">
@@ -13201,8 +13366,11 @@
           <a:p>
             <a:pPr algn="l">
               <a:lnSpc>
-                <a:spcPct val="130000"/>
+                <a:spcPct val="135000"/>
               </a:lnSpc>
+              <a:spcAft>
+                <a:spcPts val="600"/>
+              </a:spcAft>
             </a:pPr>
             <a:r>
               <a:rPr sz="1800">
@@ -13241,8 +13409,8 @@
         </p:nvSpPr>
         <p:spPr>
           <a:xfrm>
-            <a:off x="457200" y="457200"/>
-            <a:ext cx="11277295" cy="822960"/>
+            <a:off x="457200" y="365760"/>
+            <a:ext cx="11277295" cy="914400"/>
           </a:xfrm>
           <a:prstGeom prst="rect">
             <a:avLst/>
@@ -13250,14 +13418,14 @@
           <a:noFill/>
         </p:spPr>
         <p:txBody>
-          <a:bodyPr wrap="square" lIns="45720" rIns="45720" tIns="18288" bIns="18288">
-            <a:spAutoFit/>
+          <a:bodyPr wrap="square" anchor="ctr" lIns="0" rIns="0" tIns="0" bIns="0">
+            <a:noAutofit/>
           </a:bodyPr>
           <a:lstStyle/>
           <a:p>
             <a:pPr algn="l"/>
             <a:r>
-              <a:rPr sz="3000" b="1">
+              <a:rPr sz="2800" b="1" i="0">
                 <a:solidFill>
                   <a:srgbClr val="1F4E78"/>
                 </a:solidFill>
@@ -13275,8 +13443,8 @@
         </p:nvSpPr>
         <p:spPr>
           <a:xfrm>
-            <a:off x="457200" y="1234440"/>
-            <a:ext cx="1828800" cy="36576"/>
+            <a:off x="457200" y="1298448"/>
+            <a:ext cx="2194560" cy="36576"/>
           </a:xfrm>
           <a:prstGeom prst="rect">
             <a:avLst/>
@@ -13318,8 +13486,8 @@
         </p:nvSpPr>
         <p:spPr>
           <a:xfrm>
-            <a:off x="457200" y="1463040"/>
-            <a:ext cx="11277295" cy="640080"/>
+            <a:off x="457200" y="1508760"/>
+            <a:ext cx="11277295" cy="502920"/>
           </a:xfrm>
           <a:prstGeom prst="rect">
             <a:avLst/>
@@ -13327,14 +13495,14 @@
           <a:noFill/>
         </p:spPr>
         <p:txBody>
-          <a:bodyPr wrap="square" lIns="45720" rIns="45720" tIns="18288" bIns="18288">
-            <a:spAutoFit/>
+          <a:bodyPr wrap="square" anchor="ctr" lIns="0" rIns="0" tIns="0" bIns="0">
+            <a:noAutofit/>
           </a:bodyPr>
           <a:lstStyle/>
           <a:p>
             <a:pPr algn="l"/>
             <a:r>
-              <a:rPr sz="2200" b="1">
+              <a:rPr sz="2000" b="1" i="0">
                 <a:solidFill>
                   <a:srgbClr val="C0392B"/>
                 </a:solidFill>
@@ -13353,7 +13521,7 @@
           <p:nvPr/>
         </p:nvGraphicFramePr>
         <p:xfrm>
-          <a:off x="457200" y="2286000"/>
+          <a:off x="457200" y="2148840"/>
           <a:ext cx="11277295" cy="2286000"/>
         </p:xfrm>
         <a:graphic>
@@ -13728,14 +13896,14 @@
           <a:noFill/>
         </p:spPr>
         <p:txBody>
-          <a:bodyPr wrap="square" lIns="45720" rIns="45720" tIns="18288" bIns="18288">
-            <a:spAutoFit/>
+          <a:bodyPr wrap="square" anchor="ctr" lIns="0" rIns="0" tIns="0" bIns="0">
+            <a:noAutofit/>
           </a:bodyPr>
           <a:lstStyle/>
           <a:p>
             <a:pPr algn="l"/>
             <a:r>
-              <a:rPr sz="1100" b="0">
+              <a:rPr sz="1100" b="0" i="1">
                 <a:solidFill>
                   <a:srgbClr val="808080"/>
                 </a:solidFill>
@@ -13771,8 +13939,8 @@
         </p:nvSpPr>
         <p:spPr>
           <a:xfrm>
-            <a:off x="457200" y="457200"/>
-            <a:ext cx="11277295" cy="822960"/>
+            <a:off x="457200" y="365760"/>
+            <a:ext cx="11277295" cy="914400"/>
           </a:xfrm>
           <a:prstGeom prst="rect">
             <a:avLst/>
@@ -13780,14 +13948,14 @@
           <a:noFill/>
         </p:spPr>
         <p:txBody>
-          <a:bodyPr wrap="square" lIns="45720" rIns="45720" tIns="18288" bIns="18288">
-            <a:spAutoFit/>
+          <a:bodyPr wrap="square" anchor="ctr" lIns="0" rIns="0" tIns="0" bIns="0">
+            <a:noAutofit/>
           </a:bodyPr>
           <a:lstStyle/>
           <a:p>
             <a:pPr algn="l"/>
             <a:r>
-              <a:rPr sz="3000" b="1">
+              <a:rPr sz="2800" b="1" i="0">
                 <a:solidFill>
                   <a:srgbClr val="1F4E78"/>
                 </a:solidFill>
@@ -13805,8 +13973,8 @@
         </p:nvSpPr>
         <p:spPr>
           <a:xfrm>
-            <a:off x="457200" y="1234440"/>
-            <a:ext cx="1828800" cy="36576"/>
+            <a:off x="457200" y="1298448"/>
+            <a:ext cx="2194560" cy="36576"/>
           </a:xfrm>
           <a:prstGeom prst="rect">
             <a:avLst/>
@@ -13848,8 +14016,8 @@
         </p:nvSpPr>
         <p:spPr>
           <a:xfrm>
-            <a:off x="457200" y="1463040"/>
-            <a:ext cx="11277295" cy="640080"/>
+            <a:off x="457200" y="1508760"/>
+            <a:ext cx="11277295" cy="502920"/>
           </a:xfrm>
           <a:prstGeom prst="rect">
             <a:avLst/>
@@ -13857,14 +14025,14 @@
           <a:noFill/>
         </p:spPr>
         <p:txBody>
-          <a:bodyPr wrap="square" lIns="45720" rIns="45720" tIns="18288" bIns="18288">
-            <a:spAutoFit/>
+          <a:bodyPr wrap="square" anchor="ctr" lIns="0" rIns="0" tIns="0" bIns="0">
+            <a:noAutofit/>
           </a:bodyPr>
           <a:lstStyle/>
           <a:p>
             <a:pPr algn="l"/>
             <a:r>
-              <a:rPr sz="2200" b="1">
+              <a:rPr sz="2000" b="1" i="0">
                 <a:solidFill>
                   <a:srgbClr val="C0392B"/>
                 </a:solidFill>
@@ -13883,7 +14051,7 @@
           <p:nvPr/>
         </p:nvGraphicFramePr>
         <p:xfrm>
-          <a:off x="457200" y="2286000"/>
+          <a:off x="457200" y="2148840"/>
           <a:ext cx="11277295" cy="1828800"/>
         </p:xfrm>
         <a:graphic>
@@ -14110,8 +14278,8 @@
         </p:nvSpPr>
         <p:spPr>
           <a:xfrm>
-            <a:off x="457200" y="457200"/>
-            <a:ext cx="11277295" cy="822960"/>
+            <a:off x="457200" y="365760"/>
+            <a:ext cx="11277295" cy="914400"/>
           </a:xfrm>
           <a:prstGeom prst="rect">
             <a:avLst/>
@@ -14119,14 +14287,14 @@
           <a:noFill/>
         </p:spPr>
         <p:txBody>
-          <a:bodyPr wrap="square" lIns="45720" rIns="45720" tIns="18288" bIns="18288">
-            <a:spAutoFit/>
+          <a:bodyPr wrap="square" anchor="ctr" lIns="0" rIns="0" tIns="0" bIns="0">
+            <a:noAutofit/>
           </a:bodyPr>
           <a:lstStyle/>
           <a:p>
             <a:pPr algn="l"/>
             <a:r>
-              <a:rPr sz="3000" b="1">
+              <a:rPr sz="2800" b="1" i="0">
                 <a:solidFill>
                   <a:srgbClr val="1F4E78"/>
                 </a:solidFill>
@@ -14144,8 +14312,8 @@
         </p:nvSpPr>
         <p:spPr>
           <a:xfrm>
-            <a:off x="457200" y="1234440"/>
-            <a:ext cx="1828800" cy="36576"/>
+            <a:off x="457200" y="1298448"/>
+            <a:ext cx="2194560" cy="36576"/>
           </a:xfrm>
           <a:prstGeom prst="rect">
             <a:avLst/>
@@ -14187,8 +14355,8 @@
         </p:nvSpPr>
         <p:spPr>
           <a:xfrm>
-            <a:off x="822960" y="1463040"/>
-            <a:ext cx="10545775" cy="4892040"/>
+            <a:off x="822960" y="2148840"/>
+            <a:ext cx="10545775" cy="4114800"/>
           </a:xfrm>
           <a:prstGeom prst="rect">
             <a:avLst/>
@@ -14196,15 +14364,18 @@
           <a:noFill/>
         </p:spPr>
         <p:txBody>
-          <a:bodyPr wrap="square" lIns="45720" rIns="45720">
-            <a:spAutoFit/>
+          <a:bodyPr wrap="square" anchor="t" lIns="0" rIns="0" tIns="0" bIns="0">
+            <a:noAutofit/>
           </a:bodyPr>
           <a:lstStyle/>
           <a:p>
             <a:pPr algn="l">
               <a:lnSpc>
-                <a:spcPct val="130000"/>
+                <a:spcPct val="135000"/>
               </a:lnSpc>
+              <a:spcAft>
+                <a:spcPts val="600"/>
+              </a:spcAft>
             </a:pPr>
             <a:r>
               <a:rPr sz="2200">
@@ -14218,8 +14389,11 @@
           <a:p>
             <a:pPr algn="l">
               <a:lnSpc>
-                <a:spcPct val="130000"/>
+                <a:spcPct val="135000"/>
               </a:lnSpc>
+              <a:spcAft>
+                <a:spcPts val="600"/>
+              </a:spcAft>
             </a:pPr>
             <a:r>
               <a:rPr sz="2200">
@@ -14233,8 +14407,11 @@
           <a:p>
             <a:pPr algn="l">
               <a:lnSpc>
-                <a:spcPct val="130000"/>
+                <a:spcPct val="135000"/>
               </a:lnSpc>
+              <a:spcAft>
+                <a:spcPts val="600"/>
+              </a:spcAft>
             </a:pPr>
             <a:r>
               <a:rPr sz="2200">
@@ -14248,8 +14425,11 @@
           <a:p>
             <a:pPr algn="l">
               <a:lnSpc>
-                <a:spcPct val="130000"/>
+                <a:spcPct val="135000"/>
               </a:lnSpc>
+              <a:spcAft>
+                <a:spcPts val="600"/>
+              </a:spcAft>
             </a:pPr>
             <a:r>
               <a:rPr sz="2200">
@@ -14263,8 +14443,11 @@
           <a:p>
             <a:pPr algn="l">
               <a:lnSpc>
-                <a:spcPct val="130000"/>
+                <a:spcPct val="135000"/>
               </a:lnSpc>
+              <a:spcAft>
+                <a:spcPts val="600"/>
+              </a:spcAft>
             </a:pPr>
             <a:r>
               <a:rPr sz="2200">
@@ -14355,14 +14538,14 @@
           <a:noFill/>
         </p:spPr>
         <p:txBody>
-          <a:bodyPr wrap="square" lIns="45720" rIns="45720" tIns="18288" bIns="18288">
-            <a:spAutoFit/>
+          <a:bodyPr wrap="square" anchor="ctr" lIns="0" rIns="0" tIns="0" bIns="0">
+            <a:noAutofit/>
           </a:bodyPr>
           <a:lstStyle/>
           <a:p>
             <a:pPr algn="ctr"/>
             <a:r>
-              <a:rPr sz="5800" b="1">
+              <a:rPr sz="5800" b="1" i="0">
                 <a:solidFill>
                   <a:srgbClr val="FFFFFF"/>
                 </a:solidFill>
@@ -14398,8 +14581,8 @@
         </p:nvSpPr>
         <p:spPr>
           <a:xfrm>
-            <a:off x="457200" y="457200"/>
-            <a:ext cx="11277295" cy="822960"/>
+            <a:off x="457200" y="365760"/>
+            <a:ext cx="11277295" cy="914400"/>
           </a:xfrm>
           <a:prstGeom prst="rect">
             <a:avLst/>
@@ -14407,14 +14590,14 @@
           <a:noFill/>
         </p:spPr>
         <p:txBody>
-          <a:bodyPr wrap="square" lIns="45720" rIns="45720" tIns="18288" bIns="18288">
-            <a:spAutoFit/>
+          <a:bodyPr wrap="square" anchor="ctr" lIns="0" rIns="0" tIns="0" bIns="0">
+            <a:noAutofit/>
           </a:bodyPr>
           <a:lstStyle/>
           <a:p>
             <a:pPr algn="l"/>
             <a:r>
-              <a:rPr sz="3000" b="1">
+              <a:rPr sz="2800" b="1" i="0">
                 <a:solidFill>
                   <a:srgbClr val="1F4E78"/>
                 </a:solidFill>
@@ -14432,8 +14615,8 @@
         </p:nvSpPr>
         <p:spPr>
           <a:xfrm>
-            <a:off x="457200" y="1234440"/>
-            <a:ext cx="1828800" cy="36576"/>
+            <a:off x="457200" y="1298448"/>
+            <a:ext cx="2194560" cy="36576"/>
           </a:xfrm>
           <a:prstGeom prst="rect">
             <a:avLst/>
@@ -14475,8 +14658,8 @@
         </p:nvSpPr>
         <p:spPr>
           <a:xfrm>
-            <a:off x="457200" y="1463040"/>
-            <a:ext cx="11277295" cy="640080"/>
+            <a:off x="457200" y="1508760"/>
+            <a:ext cx="11277295" cy="502920"/>
           </a:xfrm>
           <a:prstGeom prst="rect">
             <a:avLst/>
@@ -14484,14 +14667,14 @@
           <a:noFill/>
         </p:spPr>
         <p:txBody>
-          <a:bodyPr wrap="square" lIns="45720" rIns="45720" tIns="18288" bIns="18288">
-            <a:spAutoFit/>
+          <a:bodyPr wrap="square" anchor="ctr" lIns="0" rIns="0" tIns="0" bIns="0">
+            <a:noAutofit/>
           </a:bodyPr>
           <a:lstStyle/>
           <a:p>
             <a:pPr algn="l"/>
             <a:r>
-              <a:rPr sz="2200" b="1">
+              <a:rPr sz="2000" b="1" i="0">
                 <a:solidFill>
                   <a:srgbClr val="C0392B"/>
                 </a:solidFill>
@@ -14510,7 +14693,7 @@
           <p:nvPr/>
         </p:nvGraphicFramePr>
         <p:xfrm>
-          <a:off x="457200" y="2286000"/>
+          <a:off x="457200" y="2148840"/>
           <a:ext cx="11277295" cy="3657600"/>
         </p:xfrm>
         <a:graphic>
